--- a/Swim_Water_Safety_Years_7-8.pptx
+++ b/Swim_Water_Safety_Years_7-8.pptx
@@ -45,6 +45,7 @@
     <p:sldId id="293" r:id="rId39"/>
     <p:sldId id="294" r:id="rId40"/>
     <p:sldId id="295" r:id="rId41"/>
+    <p:sldId id="296" r:id="rId47"/>
   </p:sldIdLst>
   <p:notesMasterIdLst>
     <p:notesMasterId r:id="rId42"/>
@@ -4358,6 +4359,10 @@
           </a:solidFill>
           <a:ln/>
         </p:spPr>
+        <p:txBody>
+          <a:bodyPr/>
+          <a:p/>
+        </p:txBody>
       </p:sp>
       <p:sp>
         <p:nvSpPr>
@@ -4380,6 +4385,10 @@
           </a:solidFill>
           <a:ln/>
         </p:spPr>
+        <p:txBody>
+          <a:bodyPr/>
+          <a:p/>
+        </p:txBody>
       </p:sp>
       <p:sp>
         <p:nvSpPr>
@@ -4402,6 +4411,10 @@
           </a:solidFill>
           <a:ln/>
         </p:spPr>
+        <p:txBody>
+          <a:bodyPr/>
+          <a:p/>
+        </p:txBody>
       </p:sp>
       <p:sp>
         <p:nvSpPr>
@@ -4584,6 +4597,10 @@
             <a:prstDash val="solid"/>
           </a:ln>
         </p:spPr>
+        <p:txBody>
+          <a:bodyPr/>
+          <a:p/>
+        </p:txBody>
       </p:sp>
       <p:sp>
         <p:nvSpPr>
@@ -4661,6 +4678,10 @@
             <a:prstDash val="solid"/>
           </a:ln>
         </p:spPr>
+        <p:txBody>
+          <a:bodyPr/>
+          <a:p/>
+        </p:txBody>
       </p:sp>
       <p:sp>
         <p:nvSpPr>
@@ -4738,6 +4759,10 @@
             <a:prstDash val="solid"/>
           </a:ln>
         </p:spPr>
+        <p:txBody>
+          <a:bodyPr/>
+          <a:p/>
+        </p:txBody>
       </p:sp>
       <p:sp>
         <p:nvSpPr>
@@ -4804,6 +4829,10 @@
           </a:solidFill>
           <a:ln/>
         </p:spPr>
+        <p:txBody>
+          <a:bodyPr/>
+          <a:p/>
+        </p:txBody>
       </p:sp>
     </p:spTree>
   </p:cSld>
@@ -5205,6 +5234,10 @@
             <a:prstDash val="solid"/>
           </a:ln>
         </p:spPr>
+        <p:txBody>
+          <a:bodyPr/>
+          <a:p/>
+        </p:txBody>
       </p:sp>
       <p:sp>
         <p:nvSpPr>
@@ -5282,6 +5315,10 @@
             <a:prstDash val="solid"/>
           </a:ln>
         </p:spPr>
+        <p:txBody>
+          <a:bodyPr/>
+          <a:p/>
+        </p:txBody>
       </p:sp>
       <p:sp>
         <p:nvSpPr>
@@ -5475,6 +5512,10 @@
             <a:prstDash val="solid"/>
           </a:ln>
         </p:spPr>
+        <p:txBody>
+          <a:bodyPr/>
+          <a:p/>
+        </p:txBody>
       </p:sp>
       <p:sp>
         <p:nvSpPr>
@@ -5495,6 +5536,10 @@
           </a:solidFill>
           <a:ln/>
         </p:spPr>
+        <p:txBody>
+          <a:bodyPr/>
+          <a:p/>
+        </p:txBody>
       </p:sp>
       <p:sp>
         <p:nvSpPr>
@@ -5515,6 +5560,10 @@
           </a:solidFill>
           <a:ln/>
         </p:spPr>
+        <p:txBody>
+          <a:bodyPr/>
+          <a:p/>
+        </p:txBody>
       </p:sp>
       <p:sp>
         <p:nvSpPr>
@@ -5647,6 +5696,10 @@
             <a:prstDash val="solid"/>
           </a:ln>
         </p:spPr>
+        <p:txBody>
+          <a:bodyPr/>
+          <a:p/>
+        </p:txBody>
       </p:sp>
       <p:sp>
         <p:nvSpPr>
@@ -5667,6 +5720,10 @@
           </a:solidFill>
           <a:ln/>
         </p:spPr>
+        <p:txBody>
+          <a:bodyPr/>
+          <a:p/>
+        </p:txBody>
       </p:sp>
       <p:sp>
         <p:nvSpPr>
@@ -5687,6 +5744,10 @@
           </a:solidFill>
           <a:ln/>
         </p:spPr>
+        <p:txBody>
+          <a:bodyPr/>
+          <a:p/>
+        </p:txBody>
       </p:sp>
       <p:sp>
         <p:nvSpPr>
@@ -5819,6 +5880,10 @@
             <a:prstDash val="solid"/>
           </a:ln>
         </p:spPr>
+        <p:txBody>
+          <a:bodyPr/>
+          <a:p/>
+        </p:txBody>
       </p:sp>
       <p:sp>
         <p:nvSpPr>
@@ -5839,6 +5904,10 @@
           </a:solidFill>
           <a:ln/>
         </p:spPr>
+        <p:txBody>
+          <a:bodyPr/>
+          <a:p/>
+        </p:txBody>
       </p:sp>
       <p:sp>
         <p:nvSpPr>
@@ -5859,6 +5928,10 @@
           </a:solidFill>
           <a:ln/>
         </p:spPr>
+        <p:txBody>
+          <a:bodyPr/>
+          <a:p/>
+        </p:txBody>
       </p:sp>
       <p:sp>
         <p:nvSpPr>
@@ -5879,6 +5952,10 @@
           </a:solidFill>
           <a:ln/>
         </p:spPr>
+        <p:txBody>
+          <a:bodyPr/>
+          <a:p/>
+        </p:txBody>
       </p:sp>
       <p:sp>
         <p:nvSpPr>
@@ -5899,6 +5976,10 @@
           </a:solidFill>
           <a:ln/>
         </p:spPr>
+        <p:txBody>
+          <a:bodyPr/>
+          <a:p/>
+        </p:txBody>
       </p:sp>
       <p:sp>
         <p:nvSpPr>
@@ -5919,6 +6000,10 @@
           </a:solidFill>
           <a:ln/>
         </p:spPr>
+        <p:txBody>
+          <a:bodyPr/>
+          <a:p/>
+        </p:txBody>
       </p:sp>
       <p:sp>
         <p:nvSpPr>
@@ -5939,6 +6024,10 @@
           </a:solidFill>
           <a:ln/>
         </p:spPr>
+        <p:txBody>
+          <a:bodyPr/>
+          <a:p/>
+        </p:txBody>
       </p:sp>
       <p:sp>
         <p:nvSpPr>
@@ -6071,6 +6160,10 @@
             <a:prstDash val="solid"/>
           </a:ln>
         </p:spPr>
+        <p:txBody>
+          <a:bodyPr/>
+          <a:p/>
+        </p:txBody>
       </p:sp>
       <p:sp>
         <p:nvSpPr>
@@ -6091,6 +6184,10 @@
           </a:solidFill>
           <a:ln/>
         </p:spPr>
+        <p:txBody>
+          <a:bodyPr/>
+          <a:p/>
+        </p:txBody>
       </p:sp>
       <p:sp>
         <p:nvSpPr>
@@ -6111,6 +6208,10 @@
           </a:solidFill>
           <a:ln/>
         </p:spPr>
+        <p:txBody>
+          <a:bodyPr/>
+          <a:p/>
+        </p:txBody>
       </p:sp>
       <p:sp>
         <p:nvSpPr>
@@ -6243,6 +6344,10 @@
             <a:prstDash val="solid"/>
           </a:ln>
         </p:spPr>
+        <p:txBody>
+          <a:bodyPr/>
+          <a:p/>
+        </p:txBody>
       </p:sp>
       <p:sp>
         <p:nvSpPr>
@@ -6263,6 +6368,10 @@
           </a:solidFill>
           <a:ln/>
         </p:spPr>
+        <p:txBody>
+          <a:bodyPr/>
+          <a:p/>
+        </p:txBody>
       </p:sp>
       <p:sp>
         <p:nvSpPr>
@@ -6283,6 +6392,10 @@
           </a:solidFill>
           <a:ln/>
         </p:spPr>
+        <p:txBody>
+          <a:bodyPr/>
+          <a:p/>
+        </p:txBody>
       </p:sp>
       <p:sp>
         <p:nvSpPr>
@@ -6415,6 +6528,10 @@
             <a:prstDash val="solid"/>
           </a:ln>
         </p:spPr>
+        <p:txBody>
+          <a:bodyPr/>
+          <a:p/>
+        </p:txBody>
       </p:sp>
       <p:sp>
         <p:nvSpPr>
@@ -6435,6 +6552,10 @@
           </a:solidFill>
           <a:ln/>
         </p:spPr>
+        <p:txBody>
+          <a:bodyPr/>
+          <a:p/>
+        </p:txBody>
       </p:sp>
       <p:sp>
         <p:nvSpPr>
@@ -6455,6 +6576,10 @@
           </a:solidFill>
           <a:ln/>
         </p:spPr>
+        <p:txBody>
+          <a:bodyPr/>
+          <a:p/>
+        </p:txBody>
       </p:sp>
       <p:sp>
         <p:nvSpPr>
@@ -6702,6 +6827,10 @@
           </a:solidFill>
           <a:ln/>
         </p:spPr>
+        <p:txBody>
+          <a:bodyPr/>
+          <a:p/>
+        </p:txBody>
       </p:sp>
       <p:pic>
         <p:nvPicPr>
@@ -6757,6 +6886,10 @@
             <a:prstDash val="solid"/>
           </a:ln>
         </p:spPr>
+        <p:txBody>
+          <a:bodyPr/>
+          <a:p/>
+        </p:txBody>
       </p:sp>
       <p:sp>
         <p:nvSpPr>
@@ -6876,6 +7009,10 @@
             <a:prstDash val="solid"/>
           </a:ln>
         </p:spPr>
+        <p:txBody>
+          <a:bodyPr/>
+          <a:p/>
+        </p:txBody>
       </p:sp>
       <p:sp>
         <p:nvSpPr>
@@ -6995,6 +7132,10 @@
             <a:prstDash val="solid"/>
           </a:ln>
         </p:spPr>
+        <p:txBody>
+          <a:bodyPr/>
+          <a:p/>
+        </p:txBody>
       </p:sp>
       <p:sp>
         <p:nvSpPr>
@@ -7114,6 +7255,10 @@
             <a:prstDash val="solid"/>
           </a:ln>
         </p:spPr>
+        <p:txBody>
+          <a:bodyPr/>
+          <a:p/>
+        </p:txBody>
       </p:sp>
       <p:sp>
         <p:nvSpPr>
@@ -7233,6 +7378,10 @@
             <a:prstDash val="solid"/>
           </a:ln>
         </p:spPr>
+        <p:txBody>
+          <a:bodyPr/>
+          <a:p/>
+        </p:txBody>
       </p:sp>
       <p:sp>
         <p:nvSpPr>
@@ -7461,6 +7610,10 @@
           </a:solidFill>
           <a:ln/>
         </p:spPr>
+        <p:txBody>
+          <a:bodyPr/>
+          <a:p/>
+        </p:txBody>
       </p:sp>
       <p:sp>
         <p:nvSpPr>
@@ -7613,6 +7766,10 @@
           </a:solidFill>
           <a:ln/>
         </p:spPr>
+        <p:txBody>
+          <a:bodyPr/>
+          <a:p/>
+        </p:txBody>
       </p:sp>
       <p:sp>
         <p:nvSpPr>
@@ -7765,6 +7922,10 @@
           </a:solidFill>
           <a:ln/>
         </p:spPr>
+        <p:txBody>
+          <a:bodyPr/>
+          <a:p/>
+        </p:txBody>
       </p:sp>
       <p:sp>
         <p:nvSpPr>
@@ -7917,6 +8078,10 @@
           </a:solidFill>
           <a:ln/>
         </p:spPr>
+        <p:txBody>
+          <a:bodyPr/>
+          <a:p/>
+        </p:txBody>
       </p:sp>
       <p:sp>
         <p:nvSpPr>
@@ -8069,6 +8234,10 @@
           </a:solidFill>
           <a:ln/>
         </p:spPr>
+        <p:txBody>
+          <a:bodyPr/>
+          <a:p/>
+        </p:txBody>
       </p:sp>
       <p:sp>
         <p:nvSpPr>
@@ -8348,6 +8517,10 @@
             </a:outerShdw>
           </a:effectLst>
         </p:spPr>
+        <p:txBody>
+          <a:bodyPr/>
+          <a:p/>
+        </p:txBody>
       </p:sp>
       <p:sp>
         <p:nvSpPr>
@@ -8368,6 +8541,10 @@
           </a:solidFill>
           <a:ln/>
         </p:spPr>
+        <p:txBody>
+          <a:bodyPr/>
+          <a:p/>
+        </p:txBody>
       </p:sp>
       <p:sp>
         <p:nvSpPr>
@@ -8500,6 +8677,10 @@
             <a:prstDash val="solid"/>
           </a:ln>
         </p:spPr>
+        <p:txBody>
+          <a:bodyPr/>
+          <a:p/>
+        </p:txBody>
       </p:sp>
       <p:sp>
         <p:nvSpPr>
@@ -8768,6 +8949,10 @@
           </a:solidFill>
           <a:ln/>
         </p:spPr>
+        <p:txBody>
+          <a:bodyPr/>
+          <a:p/>
+        </p:txBody>
       </p:sp>
       <p:sp>
         <p:nvSpPr>
@@ -8920,6 +9105,10 @@
           </a:solidFill>
           <a:ln/>
         </p:spPr>
+        <p:txBody>
+          <a:bodyPr/>
+          <a:p/>
+        </p:txBody>
       </p:sp>
       <p:sp>
         <p:nvSpPr>
@@ -9072,6 +9261,10 @@
           </a:solidFill>
           <a:ln/>
         </p:spPr>
+        <p:txBody>
+          <a:bodyPr/>
+          <a:p/>
+        </p:txBody>
       </p:sp>
       <p:sp>
         <p:nvSpPr>
@@ -9605,6 +9798,10 @@
             <a:prstDash val="solid"/>
           </a:ln>
         </p:spPr>
+        <p:txBody>
+          <a:bodyPr/>
+          <a:p/>
+        </p:txBody>
       </p:sp>
       <p:sp>
         <p:nvSpPr>
@@ -9682,6 +9879,10 @@
             <a:prstDash val="solid"/>
           </a:ln>
         </p:spPr>
+        <p:txBody>
+          <a:bodyPr/>
+          <a:p/>
+        </p:txBody>
       </p:sp>
       <p:sp>
         <p:nvSpPr>
@@ -9759,6 +9960,10 @@
             <a:prstDash val="solid"/>
           </a:ln>
         </p:spPr>
+        <p:txBody>
+          <a:bodyPr/>
+          <a:p/>
+        </p:txBody>
       </p:sp>
       <p:sp>
         <p:nvSpPr>
@@ -10172,6 +10377,10 @@
             <a:prstDash val="solid"/>
           </a:ln>
         </p:spPr>
+        <p:txBody>
+          <a:bodyPr/>
+          <a:p/>
+        </p:txBody>
       </p:sp>
       <p:sp>
         <p:nvSpPr>
@@ -10287,6 +10496,10 @@
             <a:prstDash val="solid"/>
           </a:ln>
         </p:spPr>
+        <p:txBody>
+          <a:bodyPr/>
+          <a:p/>
+        </p:txBody>
       </p:sp>
       <p:sp>
         <p:nvSpPr>
@@ -10402,6 +10615,10 @@
             <a:prstDash val="solid"/>
           </a:ln>
         </p:spPr>
+        <p:txBody>
+          <a:bodyPr/>
+          <a:p/>
+        </p:txBody>
       </p:sp>
       <p:sp>
         <p:nvSpPr>
@@ -10517,6 +10734,10 @@
             <a:prstDash val="solid"/>
           </a:ln>
         </p:spPr>
+        <p:txBody>
+          <a:bodyPr/>
+          <a:p/>
+        </p:txBody>
       </p:sp>
       <p:sp>
         <p:nvSpPr>
@@ -10791,6 +11012,10 @@
           </a:solidFill>
           <a:ln/>
         </p:spPr>
+        <p:txBody>
+          <a:bodyPr/>
+          <a:p/>
+        </p:txBody>
       </p:sp>
       <p:sp>
         <p:nvSpPr>
@@ -10995,6 +11220,10 @@
           </a:solidFill>
           <a:ln/>
         </p:spPr>
+        <p:txBody>
+          <a:bodyPr/>
+          <a:p/>
+        </p:txBody>
       </p:sp>
       <p:sp>
         <p:nvSpPr>
@@ -11199,6 +11428,10 @@
           </a:solidFill>
           <a:ln/>
         </p:spPr>
+        <p:txBody>
+          <a:bodyPr/>
+          <a:p/>
+        </p:txBody>
       </p:sp>
       <p:sp>
         <p:nvSpPr>
@@ -11403,6 +11636,10 @@
           </a:solidFill>
           <a:ln/>
         </p:spPr>
+        <p:txBody>
+          <a:bodyPr/>
+          <a:p/>
+        </p:txBody>
       </p:sp>
       <p:sp>
         <p:nvSpPr>
@@ -11607,6 +11844,10 @@
           </a:solidFill>
           <a:ln/>
         </p:spPr>
+        <p:txBody>
+          <a:bodyPr/>
+          <a:p/>
+        </p:txBody>
       </p:sp>
       <p:sp>
         <p:nvSpPr>
@@ -11929,6 +12170,10 @@
           </a:solidFill>
           <a:ln/>
         </p:spPr>
+        <p:txBody>
+          <a:bodyPr/>
+          <a:p/>
+        </p:txBody>
       </p:sp>
       <p:sp>
         <p:nvSpPr>
@@ -12081,6 +12326,10 @@
           </a:solidFill>
           <a:ln/>
         </p:spPr>
+        <p:txBody>
+          <a:bodyPr/>
+          <a:p/>
+        </p:txBody>
       </p:sp>
       <p:sp>
         <p:nvSpPr>
@@ -12233,6 +12482,10 @@
           </a:solidFill>
           <a:ln/>
         </p:spPr>
+        <p:txBody>
+          <a:bodyPr/>
+          <a:p/>
+        </p:txBody>
       </p:sp>
       <p:sp>
         <p:nvSpPr>
@@ -12385,6 +12638,10 @@
           </a:solidFill>
           <a:ln/>
         </p:spPr>
+        <p:txBody>
+          <a:bodyPr/>
+          <a:p/>
+        </p:txBody>
       </p:sp>
       <p:sp>
         <p:nvSpPr>
@@ -12537,6 +12794,10 @@
           </a:solidFill>
           <a:ln/>
         </p:spPr>
+        <p:txBody>
+          <a:bodyPr/>
+          <a:p/>
+        </p:txBody>
       </p:sp>
       <p:sp>
         <p:nvSpPr>
@@ -12845,6 +13106,10 @@
           </a:solidFill>
           <a:ln/>
         </p:spPr>
+        <p:txBody>
+          <a:bodyPr/>
+          <a:p/>
+        </p:txBody>
       </p:sp>
       <p:sp>
         <p:nvSpPr>
@@ -12957,6 +13222,10 @@
           </a:solidFill>
           <a:ln/>
         </p:spPr>
+        <p:txBody>
+          <a:bodyPr/>
+          <a:p/>
+        </p:txBody>
       </p:sp>
       <p:sp>
         <p:nvSpPr>
@@ -13069,6 +13338,10 @@
           </a:solidFill>
           <a:ln/>
         </p:spPr>
+        <p:txBody>
+          <a:bodyPr/>
+          <a:p/>
+        </p:txBody>
       </p:sp>
       <p:sp>
         <p:nvSpPr>
@@ -13181,6 +13454,10 @@
           </a:solidFill>
           <a:ln/>
         </p:spPr>
+        <p:txBody>
+          <a:bodyPr/>
+          <a:p/>
+        </p:txBody>
       </p:sp>
       <p:sp>
         <p:nvSpPr>
@@ -13293,6 +13570,10 @@
           </a:solidFill>
           <a:ln/>
         </p:spPr>
+        <p:txBody>
+          <a:bodyPr/>
+          <a:p/>
+        </p:txBody>
       </p:sp>
       <p:sp>
         <p:nvSpPr>
@@ -13405,6 +13686,10 @@
           </a:solidFill>
           <a:ln/>
         </p:spPr>
+        <p:txBody>
+          <a:bodyPr/>
+          <a:p/>
+        </p:txBody>
       </p:sp>
       <p:sp>
         <p:nvSpPr>
@@ -13517,6 +13802,10 @@
           </a:solidFill>
           <a:ln/>
         </p:spPr>
+        <p:txBody>
+          <a:bodyPr/>
+          <a:p/>
+        </p:txBody>
       </p:sp>
       <p:sp>
         <p:nvSpPr>
@@ -13859,6 +14148,10 @@
           </a:solidFill>
           <a:ln/>
         </p:spPr>
+        <p:txBody>
+          <a:bodyPr/>
+          <a:p/>
+        </p:txBody>
       </p:sp>
       <p:sp>
         <p:nvSpPr>
@@ -13879,6 +14172,10 @@
           </a:solidFill>
           <a:ln/>
         </p:spPr>
+        <p:txBody>
+          <a:bodyPr/>
+          <a:p/>
+        </p:txBody>
       </p:sp>
       <p:sp>
         <p:nvSpPr>
@@ -14031,6 +14328,10 @@
           </a:solidFill>
           <a:ln/>
         </p:spPr>
+        <p:txBody>
+          <a:bodyPr/>
+          <a:p/>
+        </p:txBody>
       </p:sp>
       <p:sp>
         <p:nvSpPr>
@@ -14183,6 +14484,10 @@
           </a:solidFill>
           <a:ln/>
         </p:spPr>
+        <p:txBody>
+          <a:bodyPr/>
+          <a:p/>
+        </p:txBody>
       </p:sp>
       <p:sp>
         <p:nvSpPr>
@@ -14335,6 +14640,10 @@
           </a:solidFill>
           <a:ln/>
         </p:spPr>
+        <p:txBody>
+          <a:bodyPr/>
+          <a:p/>
+        </p:txBody>
       </p:sp>
       <p:sp>
         <p:nvSpPr>
@@ -14487,6 +14796,10 @@
           </a:solidFill>
           <a:ln/>
         </p:spPr>
+        <p:txBody>
+          <a:bodyPr/>
+          <a:p/>
+        </p:txBody>
       </p:sp>
       <p:sp>
         <p:nvSpPr>
@@ -14639,6 +14952,10 @@
           </a:solidFill>
           <a:ln/>
         </p:spPr>
+        <p:txBody>
+          <a:bodyPr/>
+          <a:p/>
+        </p:txBody>
       </p:sp>
       <p:sp>
         <p:nvSpPr>
@@ -14791,6 +15108,10 @@
           </a:solidFill>
           <a:ln/>
         </p:spPr>
+        <p:txBody>
+          <a:bodyPr/>
+          <a:p/>
+        </p:txBody>
       </p:sp>
       <p:sp>
         <p:nvSpPr>
@@ -15443,6 +15764,10 @@
           </a:solidFill>
           <a:ln/>
         </p:spPr>
+        <p:txBody>
+          <a:bodyPr/>
+          <a:p/>
+        </p:txBody>
       </p:sp>
       <p:sp>
         <p:nvSpPr>
@@ -15587,6 +15912,10 @@
           </a:solidFill>
           <a:ln/>
         </p:spPr>
+        <p:txBody>
+          <a:bodyPr/>
+          <a:p/>
+        </p:txBody>
       </p:sp>
       <p:sp>
         <p:nvSpPr>
@@ -15731,6 +16060,10 @@
           </a:solidFill>
           <a:ln/>
         </p:spPr>
+        <p:txBody>
+          <a:bodyPr/>
+          <a:p/>
+        </p:txBody>
       </p:sp>
       <p:sp>
         <p:nvSpPr>
@@ -15875,6 +16208,10 @@
           </a:solidFill>
           <a:ln/>
         </p:spPr>
+        <p:txBody>
+          <a:bodyPr/>
+          <a:p/>
+        </p:txBody>
       </p:sp>
       <p:sp>
         <p:nvSpPr>
@@ -16019,6 +16356,10 @@
           </a:solidFill>
           <a:ln/>
         </p:spPr>
+        <p:txBody>
+          <a:bodyPr/>
+          <a:p/>
+        </p:txBody>
       </p:sp>
       <p:sp>
         <p:nvSpPr>
@@ -16288,6 +16629,10 @@
             </a:outerShdw>
           </a:effectLst>
         </p:spPr>
+        <p:txBody>
+          <a:bodyPr/>
+          <a:p/>
+        </p:txBody>
       </p:sp>
       <p:sp>
         <p:nvSpPr>
@@ -16308,6 +16653,10 @@
           </a:solidFill>
           <a:ln/>
         </p:spPr>
+        <p:txBody>
+          <a:bodyPr/>
+          <a:p/>
+        </p:txBody>
       </p:sp>
       <p:sp>
         <p:nvSpPr>
@@ -16491,6 +16840,10 @@
             <a:prstDash val="solid"/>
           </a:ln>
         </p:spPr>
+        <p:txBody>
+          <a:bodyPr/>
+          <a:p/>
+        </p:txBody>
       </p:sp>
       <p:sp>
         <p:nvSpPr>
@@ -17050,6 +17403,10 @@
             <a:prstDash val="solid"/>
           </a:ln>
         </p:spPr>
+        <p:txBody>
+          <a:bodyPr/>
+          <a:p/>
+        </p:txBody>
       </p:sp>
       <p:sp>
         <p:nvSpPr>
@@ -17127,6 +17484,10 @@
             <a:prstDash val="solid"/>
           </a:ln>
         </p:spPr>
+        <p:txBody>
+          <a:bodyPr/>
+          <a:p/>
+        </p:txBody>
       </p:sp>
       <p:sp>
         <p:nvSpPr>
@@ -17315,6 +17676,10 @@
           </a:solidFill>
           <a:ln/>
         </p:spPr>
+        <p:txBody>
+          <a:bodyPr/>
+          <a:p/>
+        </p:txBody>
       </p:sp>
       <p:sp>
         <p:nvSpPr>
@@ -17335,6 +17700,10 @@
           </a:solidFill>
           <a:ln/>
         </p:spPr>
+        <p:txBody>
+          <a:bodyPr/>
+          <a:p/>
+        </p:txBody>
       </p:sp>
       <p:sp>
         <p:nvSpPr>
@@ -17355,6 +17724,10 @@
           </a:solidFill>
           <a:ln/>
         </p:spPr>
+        <p:txBody>
+          <a:bodyPr/>
+          <a:p/>
+        </p:txBody>
       </p:sp>
       <p:sp>
         <p:nvSpPr>
@@ -17375,6 +17748,10 @@
           </a:solidFill>
           <a:ln/>
         </p:spPr>
+        <p:txBody>
+          <a:bodyPr/>
+          <a:p/>
+        </p:txBody>
       </p:sp>
       <p:sp>
         <p:nvSpPr>
@@ -17395,6 +17772,10 @@
           </a:solidFill>
           <a:ln/>
         </p:spPr>
+        <p:txBody>
+          <a:bodyPr/>
+          <a:p/>
+        </p:txBody>
       </p:sp>
       <p:sp>
         <p:nvSpPr>
@@ -17607,6 +17988,10 @@
           </a:solidFill>
           <a:ln/>
         </p:spPr>
+        <p:txBody>
+          <a:bodyPr/>
+          <a:p/>
+        </p:txBody>
       </p:sp>
       <p:sp>
         <p:nvSpPr>
@@ -17717,6 +18102,10 @@
           </a:solidFill>
           <a:ln/>
         </p:spPr>
+        <p:txBody>
+          <a:bodyPr/>
+          <a:p/>
+        </p:txBody>
       </p:sp>
       <p:sp>
         <p:nvSpPr>
@@ -17737,6 +18126,10 @@
           </a:solidFill>
           <a:ln/>
         </p:spPr>
+        <p:txBody>
+          <a:bodyPr/>
+          <a:p/>
+        </p:txBody>
       </p:sp>
       <p:sp>
         <p:nvSpPr>
@@ -17757,6 +18150,10 @@
           </a:solidFill>
           <a:ln/>
         </p:spPr>
+        <p:txBody>
+          <a:bodyPr/>
+          <a:p/>
+        </p:txBody>
       </p:sp>
       <p:sp>
         <p:nvSpPr>
@@ -17777,6 +18174,10 @@
           </a:solidFill>
           <a:ln/>
         </p:spPr>
+        <p:txBody>
+          <a:bodyPr/>
+          <a:p/>
+        </p:txBody>
       </p:sp>
       <p:sp>
         <p:nvSpPr>
@@ -17797,6 +18198,10 @@
           </a:solidFill>
           <a:ln/>
         </p:spPr>
+        <p:txBody>
+          <a:bodyPr/>
+          <a:p/>
+        </p:txBody>
       </p:sp>
       <p:sp>
         <p:nvSpPr>
@@ -18009,6 +18414,10 @@
           </a:solidFill>
           <a:ln/>
         </p:spPr>
+        <p:txBody>
+          <a:bodyPr/>
+          <a:p/>
+        </p:txBody>
       </p:sp>
       <p:sp>
         <p:nvSpPr>
@@ -18119,6 +18528,10 @@
           </a:solidFill>
           <a:ln/>
         </p:spPr>
+        <p:txBody>
+          <a:bodyPr/>
+          <a:p/>
+        </p:txBody>
       </p:sp>
       <p:sp>
         <p:nvSpPr>
@@ -18139,6 +18552,10 @@
           </a:solidFill>
           <a:ln/>
         </p:spPr>
+        <p:txBody>
+          <a:bodyPr/>
+          <a:p/>
+        </p:txBody>
       </p:sp>
       <p:sp>
         <p:nvSpPr>
@@ -18159,6 +18576,10 @@
           </a:solidFill>
           <a:ln/>
         </p:spPr>
+        <p:txBody>
+          <a:bodyPr/>
+          <a:p/>
+        </p:txBody>
       </p:sp>
       <p:sp>
         <p:nvSpPr>
@@ -18179,6 +18600,10 @@
           </a:solidFill>
           <a:ln/>
         </p:spPr>
+        <p:txBody>
+          <a:bodyPr/>
+          <a:p/>
+        </p:txBody>
       </p:sp>
       <p:sp>
         <p:nvSpPr>
@@ -18199,6 +18624,10 @@
           </a:solidFill>
           <a:ln/>
         </p:spPr>
+        <p:txBody>
+          <a:bodyPr/>
+          <a:p/>
+        </p:txBody>
       </p:sp>
       <p:sp>
         <p:nvSpPr>
@@ -18411,6 +18840,10 @@
           </a:solidFill>
           <a:ln/>
         </p:spPr>
+        <p:txBody>
+          <a:bodyPr/>
+          <a:p/>
+        </p:txBody>
       </p:sp>
       <p:sp>
         <p:nvSpPr>
@@ -18675,6 +19108,10 @@
           </a:solidFill>
           <a:ln/>
         </p:spPr>
+        <p:txBody>
+          <a:bodyPr/>
+          <a:p/>
+        </p:txBody>
       </p:sp>
       <p:sp>
         <p:nvSpPr>
@@ -18695,6 +19132,10 @@
           </a:solidFill>
           <a:ln/>
         </p:spPr>
+        <p:txBody>
+          <a:bodyPr/>
+          <a:p/>
+        </p:txBody>
       </p:sp>
       <p:sp>
         <p:nvSpPr>
@@ -18715,6 +19156,10 @@
           </a:solidFill>
           <a:ln/>
         </p:spPr>
+        <p:txBody>
+          <a:bodyPr/>
+          <a:p/>
+        </p:txBody>
       </p:sp>
       <p:sp>
         <p:nvSpPr>
@@ -18735,6 +19180,10 @@
           </a:solidFill>
           <a:ln/>
         </p:spPr>
+        <p:txBody>
+          <a:bodyPr/>
+          <a:p/>
+        </p:txBody>
       </p:sp>
       <p:sp>
         <p:nvSpPr>
@@ -18755,6 +19204,10 @@
           </a:solidFill>
           <a:ln/>
         </p:spPr>
+        <p:txBody>
+          <a:bodyPr/>
+          <a:p/>
+        </p:txBody>
       </p:sp>
       <p:sp>
         <p:nvSpPr>
@@ -18909,6 +19362,10 @@
           </a:solidFill>
           <a:ln/>
         </p:spPr>
+        <p:txBody>
+          <a:bodyPr/>
+          <a:p/>
+        </p:txBody>
       </p:sp>
       <p:sp>
         <p:nvSpPr>
@@ -18929,6 +19386,10 @@
           </a:solidFill>
           <a:ln/>
         </p:spPr>
+        <p:txBody>
+          <a:bodyPr/>
+          <a:p/>
+        </p:txBody>
       </p:sp>
       <p:sp>
         <p:nvSpPr>
@@ -18949,6 +19410,10 @@
           </a:solidFill>
           <a:ln/>
         </p:spPr>
+        <p:txBody>
+          <a:bodyPr/>
+          <a:p/>
+        </p:txBody>
       </p:sp>
       <p:sp>
         <p:nvSpPr>
@@ -18969,6 +19434,10 @@
           </a:solidFill>
           <a:ln/>
         </p:spPr>
+        <p:txBody>
+          <a:bodyPr/>
+          <a:p/>
+        </p:txBody>
       </p:sp>
       <p:sp>
         <p:nvSpPr>
@@ -18989,6 +19458,10 @@
           </a:solidFill>
           <a:ln/>
         </p:spPr>
+        <p:txBody>
+          <a:bodyPr/>
+          <a:p/>
+        </p:txBody>
       </p:sp>
       <p:sp>
         <p:nvSpPr>
@@ -19143,6 +19616,10 @@
           </a:solidFill>
           <a:ln/>
         </p:spPr>
+        <p:txBody>
+          <a:bodyPr/>
+          <a:p/>
+        </p:txBody>
       </p:sp>
       <p:sp>
         <p:nvSpPr>
@@ -19163,6 +19640,10 @@
           </a:solidFill>
           <a:ln/>
         </p:spPr>
+        <p:txBody>
+          <a:bodyPr/>
+          <a:p/>
+        </p:txBody>
       </p:sp>
       <p:sp>
         <p:nvSpPr>
@@ -19183,6 +19664,10 @@
           </a:solidFill>
           <a:ln/>
         </p:spPr>
+        <p:txBody>
+          <a:bodyPr/>
+          <a:p/>
+        </p:txBody>
       </p:sp>
       <p:sp>
         <p:nvSpPr>
@@ -19203,6 +19688,10 @@
           </a:solidFill>
           <a:ln/>
         </p:spPr>
+        <p:txBody>
+          <a:bodyPr/>
+          <a:p/>
+        </p:txBody>
       </p:sp>
       <p:sp>
         <p:nvSpPr>
@@ -19223,6 +19712,10 @@
           </a:solidFill>
           <a:ln/>
         </p:spPr>
+        <p:txBody>
+          <a:bodyPr/>
+          <a:p/>
+        </p:txBody>
       </p:sp>
       <p:sp>
         <p:nvSpPr>
@@ -19377,6 +19870,10 @@
           </a:solidFill>
           <a:ln/>
         </p:spPr>
+        <p:txBody>
+          <a:bodyPr/>
+          <a:p/>
+        </p:txBody>
       </p:sp>
       <p:sp>
         <p:nvSpPr>
@@ -19397,6 +19894,10 @@
           </a:solidFill>
           <a:ln/>
         </p:spPr>
+        <p:txBody>
+          <a:bodyPr/>
+          <a:p/>
+        </p:txBody>
       </p:sp>
       <p:sp>
         <p:nvSpPr>
@@ -19417,6 +19918,10 @@
           </a:solidFill>
           <a:ln/>
         </p:spPr>
+        <p:txBody>
+          <a:bodyPr/>
+          <a:p/>
+        </p:txBody>
       </p:sp>
       <p:sp>
         <p:nvSpPr>
@@ -19437,6 +19942,10 @@
           </a:solidFill>
           <a:ln/>
         </p:spPr>
+        <p:txBody>
+          <a:bodyPr/>
+          <a:p/>
+        </p:txBody>
       </p:sp>
       <p:sp>
         <p:nvSpPr>
@@ -19457,6 +19966,10 @@
           </a:solidFill>
           <a:ln/>
         </p:spPr>
+        <p:txBody>
+          <a:bodyPr/>
+          <a:p/>
+        </p:txBody>
       </p:sp>
       <p:sp>
         <p:nvSpPr>
@@ -19611,6 +20124,10 @@
           </a:solidFill>
           <a:ln/>
         </p:spPr>
+        <p:txBody>
+          <a:bodyPr/>
+          <a:p/>
+        </p:txBody>
       </p:sp>
       <p:sp>
         <p:nvSpPr>
@@ -19631,6 +20148,10 @@
           </a:solidFill>
           <a:ln/>
         </p:spPr>
+        <p:txBody>
+          <a:bodyPr/>
+          <a:p/>
+        </p:txBody>
       </p:sp>
       <p:sp>
         <p:nvSpPr>
@@ -19651,6 +20172,10 @@
           </a:solidFill>
           <a:ln/>
         </p:spPr>
+        <p:txBody>
+          <a:bodyPr/>
+          <a:p/>
+        </p:txBody>
       </p:sp>
       <p:sp>
         <p:nvSpPr>
@@ -19671,6 +20196,10 @@
           </a:solidFill>
           <a:ln/>
         </p:spPr>
+        <p:txBody>
+          <a:bodyPr/>
+          <a:p/>
+        </p:txBody>
       </p:sp>
       <p:sp>
         <p:nvSpPr>
@@ -19691,6 +20220,10 @@
           </a:solidFill>
           <a:ln/>
         </p:spPr>
+        <p:txBody>
+          <a:bodyPr/>
+          <a:p/>
+        </p:txBody>
       </p:sp>
       <p:sp>
         <p:nvSpPr>
@@ -20110,6 +20643,10 @@
             <a:prstDash val="solid"/>
           </a:ln>
         </p:spPr>
+        <p:txBody>
+          <a:bodyPr/>
+          <a:p/>
+        </p:txBody>
       </p:sp>
       <p:sp>
         <p:nvSpPr>
@@ -20187,6 +20724,10 @@
             <a:prstDash val="solid"/>
           </a:ln>
         </p:spPr>
+        <p:txBody>
+          <a:bodyPr/>
+          <a:p/>
+        </p:txBody>
       </p:sp>
       <p:sp>
         <p:nvSpPr>
@@ -20264,6 +20805,10 @@
             <a:prstDash val="solid"/>
           </a:ln>
         </p:spPr>
+        <p:txBody>
+          <a:bodyPr/>
+          <a:p/>
+        </p:txBody>
       </p:sp>
       <p:sp>
         <p:nvSpPr>
@@ -20457,6 +21002,10 @@
             <a:prstDash val="solid"/>
           </a:ln>
         </p:spPr>
+        <p:txBody>
+          <a:bodyPr/>
+          <a:p/>
+        </p:txBody>
       </p:sp>
       <p:sp>
         <p:nvSpPr>
@@ -20660,6 +21209,10 @@
             <a:prstDash val="solid"/>
           </a:ln>
         </p:spPr>
+        <p:txBody>
+          <a:bodyPr/>
+          <a:p/>
+        </p:txBody>
       </p:sp>
       <p:sp>
         <p:nvSpPr>
@@ -20863,6 +21416,10 @@
             <a:prstDash val="solid"/>
           </a:ln>
         </p:spPr>
+        <p:txBody>
+          <a:bodyPr/>
+          <a:p/>
+        </p:txBody>
       </p:sp>
       <p:sp>
         <p:nvSpPr>
@@ -21267,6 +21824,10 @@
           </a:solidFill>
           <a:ln/>
         </p:spPr>
+        <p:txBody>
+          <a:bodyPr/>
+          <a:p/>
+        </p:txBody>
       </p:sp>
       <p:sp>
         <p:nvSpPr>
@@ -21463,6 +22024,10 @@
           </a:solidFill>
           <a:ln/>
         </p:spPr>
+        <p:txBody>
+          <a:bodyPr/>
+          <a:p/>
+        </p:txBody>
       </p:sp>
       <p:sp>
         <p:nvSpPr>
@@ -21955,6 +22520,10 @@
           </a:solidFill>
           <a:ln/>
         </p:spPr>
+        <p:txBody>
+          <a:bodyPr/>
+          <a:p/>
+        </p:txBody>
       </p:sp>
       <p:sp>
         <p:nvSpPr>
@@ -22107,6 +22676,10 @@
           </a:solidFill>
           <a:ln/>
         </p:spPr>
+        <p:txBody>
+          <a:bodyPr/>
+          <a:p/>
+        </p:txBody>
       </p:sp>
       <p:sp>
         <p:nvSpPr>
@@ -22259,6 +22832,10 @@
           </a:solidFill>
           <a:ln/>
         </p:spPr>
+        <p:txBody>
+          <a:bodyPr/>
+          <a:p/>
+        </p:txBody>
       </p:sp>
       <p:sp>
         <p:nvSpPr>
@@ -22411,6 +22988,10 @@
           </a:solidFill>
           <a:ln/>
         </p:spPr>
+        <p:txBody>
+          <a:bodyPr/>
+          <a:p/>
+        </p:txBody>
       </p:sp>
       <p:sp>
         <p:nvSpPr>
@@ -22690,6 +23271,10 @@
             <a:prstDash val="solid"/>
           </a:ln>
         </p:spPr>
+        <p:txBody>
+          <a:bodyPr/>
+          <a:p/>
+        </p:txBody>
       </p:sp>
       <p:sp>
         <p:nvSpPr>
@@ -22710,6 +23295,10 @@
           </a:solidFill>
           <a:ln/>
         </p:spPr>
+        <p:txBody>
+          <a:bodyPr/>
+          <a:p/>
+        </p:txBody>
       </p:sp>
       <p:sp>
         <p:nvSpPr>
@@ -22730,6 +23319,10 @@
           </a:solidFill>
           <a:ln/>
         </p:spPr>
+        <p:txBody>
+          <a:bodyPr/>
+          <a:p/>
+        </p:txBody>
       </p:sp>
       <p:sp>
         <p:nvSpPr>
@@ -22752,6 +23345,10 @@
           </a:solidFill>
           <a:ln/>
         </p:spPr>
+        <p:txBody>
+          <a:bodyPr/>
+          <a:p/>
+        </p:txBody>
       </p:sp>
       <p:sp>
         <p:nvSpPr>
@@ -22860,6 +23457,10 @@
           </a:solidFill>
           <a:ln/>
         </p:spPr>
+        <p:txBody>
+          <a:bodyPr/>
+          <a:p/>
+        </p:txBody>
       </p:sp>
       <p:sp>
         <p:nvSpPr>
@@ -22882,6 +23483,10 @@
           </a:solidFill>
           <a:ln/>
         </p:spPr>
+        <p:txBody>
+          <a:bodyPr/>
+          <a:p/>
+        </p:txBody>
       </p:sp>
       <p:sp>
         <p:nvSpPr>
@@ -23031,6 +23636,10 @@
             <a:prstDash val="solid"/>
           </a:ln>
         </p:spPr>
+        <p:txBody>
+          <a:bodyPr/>
+          <a:p/>
+        </p:txBody>
       </p:sp>
       <p:sp>
         <p:nvSpPr>
@@ -23051,6 +23660,10 @@
           </a:solidFill>
           <a:ln/>
         </p:spPr>
+        <p:txBody>
+          <a:bodyPr/>
+          <a:p/>
+        </p:txBody>
       </p:sp>
       <p:sp>
         <p:nvSpPr>
@@ -23071,6 +23684,10 @@
           </a:solidFill>
           <a:ln/>
         </p:spPr>
+        <p:txBody>
+          <a:bodyPr/>
+          <a:p/>
+        </p:txBody>
       </p:sp>
       <p:sp>
         <p:nvSpPr>
@@ -23093,6 +23710,10 @@
           </a:solidFill>
           <a:ln/>
         </p:spPr>
+        <p:txBody>
+          <a:bodyPr/>
+          <a:p/>
+        </p:txBody>
       </p:sp>
       <p:sp>
         <p:nvSpPr>
@@ -23201,6 +23822,10 @@
           </a:solidFill>
           <a:ln/>
         </p:spPr>
+        <p:txBody>
+          <a:bodyPr/>
+          <a:p/>
+        </p:txBody>
       </p:sp>
       <p:sp>
         <p:nvSpPr>
@@ -23223,6 +23848,10 @@
           </a:solidFill>
           <a:ln/>
         </p:spPr>
+        <p:txBody>
+          <a:bodyPr/>
+          <a:p/>
+        </p:txBody>
       </p:sp>
       <p:sp>
         <p:nvSpPr>
@@ -23372,6 +24001,10 @@
             <a:prstDash val="solid"/>
           </a:ln>
         </p:spPr>
+        <p:txBody>
+          <a:bodyPr/>
+          <a:p/>
+        </p:txBody>
       </p:sp>
       <p:sp>
         <p:nvSpPr>
@@ -23392,6 +24025,10 @@
           </a:solidFill>
           <a:ln/>
         </p:spPr>
+        <p:txBody>
+          <a:bodyPr/>
+          <a:p/>
+        </p:txBody>
       </p:sp>
       <p:sp>
         <p:nvSpPr>
@@ -23412,6 +24049,10 @@
           </a:solidFill>
           <a:ln/>
         </p:spPr>
+        <p:txBody>
+          <a:bodyPr/>
+          <a:p/>
+        </p:txBody>
       </p:sp>
       <p:sp>
         <p:nvSpPr>
@@ -23434,6 +24075,10 @@
           </a:solidFill>
           <a:ln/>
         </p:spPr>
+        <p:txBody>
+          <a:bodyPr/>
+          <a:p/>
+        </p:txBody>
       </p:sp>
       <p:sp>
         <p:nvSpPr>
@@ -23542,6 +24187,10 @@
           </a:solidFill>
           <a:ln/>
         </p:spPr>
+        <p:txBody>
+          <a:bodyPr/>
+          <a:p/>
+        </p:txBody>
       </p:sp>
       <p:sp>
         <p:nvSpPr>
@@ -23564,6 +24213,10 @@
           </a:solidFill>
           <a:ln/>
         </p:spPr>
+        <p:txBody>
+          <a:bodyPr/>
+          <a:p/>
+        </p:txBody>
       </p:sp>
       <p:sp>
         <p:nvSpPr>
@@ -23713,6 +24366,10 @@
             <a:prstDash val="solid"/>
           </a:ln>
         </p:spPr>
+        <p:txBody>
+          <a:bodyPr/>
+          <a:p/>
+        </p:txBody>
       </p:sp>
       <p:sp>
         <p:nvSpPr>
@@ -23733,6 +24390,10 @@
           </a:solidFill>
           <a:ln/>
         </p:spPr>
+        <p:txBody>
+          <a:bodyPr/>
+          <a:p/>
+        </p:txBody>
       </p:sp>
       <p:sp>
         <p:nvSpPr>
@@ -23753,6 +24414,10 @@
           </a:solidFill>
           <a:ln/>
         </p:spPr>
+        <p:txBody>
+          <a:bodyPr/>
+          <a:p/>
+        </p:txBody>
       </p:sp>
       <p:sp>
         <p:nvSpPr>
@@ -23775,6 +24440,10 @@
           </a:solidFill>
           <a:ln/>
         </p:spPr>
+        <p:txBody>
+          <a:bodyPr/>
+          <a:p/>
+        </p:txBody>
       </p:sp>
       <p:sp>
         <p:nvSpPr>
@@ -23883,6 +24552,10 @@
           </a:solidFill>
           <a:ln/>
         </p:spPr>
+        <p:txBody>
+          <a:bodyPr/>
+          <a:p/>
+        </p:txBody>
       </p:sp>
       <p:sp>
         <p:nvSpPr>
@@ -23905,6 +24578,10 @@
           </a:solidFill>
           <a:ln/>
         </p:spPr>
+        <p:txBody>
+          <a:bodyPr/>
+          <a:p/>
+        </p:txBody>
       </p:sp>
       <p:sp>
         <p:nvSpPr>
@@ -24516,6 +25193,10 @@
             <a:prstDash val="solid"/>
           </a:ln>
         </p:spPr>
+        <p:txBody>
+          <a:bodyPr/>
+          <a:p/>
+        </p:txBody>
       </p:sp>
       <p:sp>
         <p:nvSpPr>
@@ -24593,6 +25274,10 @@
             <a:prstDash val="solid"/>
           </a:ln>
         </p:spPr>
+        <p:txBody>
+          <a:bodyPr/>
+          <a:p/>
+        </p:txBody>
       </p:sp>
       <p:sp>
         <p:nvSpPr>
@@ -24670,6 +25355,10 @@
             <a:prstDash val="solid"/>
           </a:ln>
         </p:spPr>
+        <p:txBody>
+          <a:bodyPr/>
+          <a:p/>
+        </p:txBody>
       </p:sp>
       <p:sp>
         <p:nvSpPr>
@@ -24863,6 +25552,10 @@
             <a:prstDash val="solid"/>
           </a:ln>
         </p:spPr>
+        <p:txBody>
+          <a:bodyPr/>
+          <a:p/>
+        </p:txBody>
       </p:sp>
       <p:sp>
         <p:nvSpPr>
@@ -25022,6 +25715,10 @@
             <a:prstDash val="solid"/>
           </a:ln>
         </p:spPr>
+        <p:txBody>
+          <a:bodyPr/>
+          <a:p/>
+        </p:txBody>
       </p:sp>
       <p:sp>
         <p:nvSpPr>
@@ -25181,6 +25878,10 @@
             <a:prstDash val="solid"/>
           </a:ln>
         </p:spPr>
+        <p:txBody>
+          <a:bodyPr/>
+          <a:p/>
+        </p:txBody>
       </p:sp>
       <p:sp>
         <p:nvSpPr>
@@ -25340,6 +26041,10 @@
             <a:prstDash val="solid"/>
           </a:ln>
         </p:spPr>
+        <p:txBody>
+          <a:bodyPr/>
+          <a:p/>
+        </p:txBody>
       </p:sp>
       <p:sp>
         <p:nvSpPr>
@@ -25499,6 +26204,10 @@
             <a:prstDash val="solid"/>
           </a:ln>
         </p:spPr>
+        <p:txBody>
+          <a:bodyPr/>
+          <a:p/>
+        </p:txBody>
       </p:sp>
       <p:sp>
         <p:nvSpPr>
@@ -25658,6 +26367,10 @@
             <a:prstDash val="solid"/>
           </a:ln>
         </p:spPr>
+        <p:txBody>
+          <a:bodyPr/>
+          <a:p/>
+        </p:txBody>
       </p:sp>
       <p:sp>
         <p:nvSpPr>
@@ -25937,6 +26650,10 @@
             <a:prstDash val="solid"/>
           </a:ln>
         </p:spPr>
+        <p:txBody>
+          <a:bodyPr/>
+          <a:p/>
+        </p:txBody>
       </p:sp>
       <p:sp>
         <p:nvSpPr>
@@ -25957,6 +26674,10 @@
           </a:solidFill>
           <a:ln/>
         </p:spPr>
+        <p:txBody>
+          <a:bodyPr/>
+          <a:p/>
+        </p:txBody>
       </p:sp>
       <p:sp>
         <p:nvSpPr>
@@ -26162,6 +26883,10 @@
             <a:prstDash val="solid"/>
           </a:ln>
         </p:spPr>
+        <p:txBody>
+          <a:bodyPr/>
+          <a:p/>
+        </p:txBody>
       </p:sp>
       <p:sp>
         <p:nvSpPr>
@@ -26182,6 +26907,10 @@
           </a:solidFill>
           <a:ln/>
         </p:spPr>
+        <p:txBody>
+          <a:bodyPr/>
+          <a:p/>
+        </p:txBody>
       </p:sp>
       <p:sp>
         <p:nvSpPr>
@@ -26387,6 +27116,10 @@
             <a:prstDash val="solid"/>
           </a:ln>
         </p:spPr>
+        <p:txBody>
+          <a:bodyPr/>
+          <a:p/>
+        </p:txBody>
       </p:sp>
       <p:sp>
         <p:nvSpPr>
@@ -26407,6 +27140,10 @@
           </a:solidFill>
           <a:ln/>
         </p:spPr>
+        <p:txBody>
+          <a:bodyPr/>
+          <a:p/>
+        </p:txBody>
       </p:sp>
       <p:sp>
         <p:nvSpPr>
@@ -26732,6 +27469,10 @@
             <a:prstDash val="solid"/>
           </a:ln>
         </p:spPr>
+        <p:txBody>
+          <a:bodyPr/>
+          <a:p/>
+        </p:txBody>
       </p:sp>
       <p:sp>
         <p:nvSpPr>
@@ -26756,6 +27497,10 @@
             <a:prstDash val="solid"/>
           </a:ln>
         </p:spPr>
+        <p:txBody>
+          <a:bodyPr/>
+          <a:p/>
+        </p:txBody>
       </p:sp>
       <p:sp>
         <p:nvSpPr>
@@ -26861,6 +27606,10 @@
             <a:prstDash val="solid"/>
           </a:ln>
         </p:spPr>
+        <p:txBody>
+          <a:bodyPr/>
+          <a:p/>
+        </p:txBody>
       </p:sp>
       <p:sp>
         <p:nvSpPr>
@@ -26885,6 +27634,10 @@
             <a:prstDash val="solid"/>
           </a:ln>
         </p:spPr>
+        <p:txBody>
+          <a:bodyPr/>
+          <a:p/>
+        </p:txBody>
       </p:sp>
       <p:sp>
         <p:nvSpPr>
@@ -26990,6 +27743,10 @@
             <a:prstDash val="solid"/>
           </a:ln>
         </p:spPr>
+        <p:txBody>
+          <a:bodyPr/>
+          <a:p/>
+        </p:txBody>
       </p:sp>
       <p:sp>
         <p:nvSpPr>
@@ -27014,6 +27771,10 @@
             <a:prstDash val="solid"/>
           </a:ln>
         </p:spPr>
+        <p:txBody>
+          <a:bodyPr/>
+          <a:p/>
+        </p:txBody>
       </p:sp>
       <p:sp>
         <p:nvSpPr>
@@ -27119,6 +27880,10 @@
             <a:prstDash val="solid"/>
           </a:ln>
         </p:spPr>
+        <p:txBody>
+          <a:bodyPr/>
+          <a:p/>
+        </p:txBody>
       </p:sp>
       <p:sp>
         <p:nvSpPr>
@@ -27143,6 +27908,10 @@
             <a:prstDash val="solid"/>
           </a:ln>
         </p:spPr>
+        <p:txBody>
+          <a:bodyPr/>
+          <a:p/>
+        </p:txBody>
       </p:sp>
       <p:sp>
         <p:nvSpPr>
@@ -27248,6 +28017,10 @@
             <a:prstDash val="solid"/>
           </a:ln>
         </p:spPr>
+        <p:txBody>
+          <a:bodyPr/>
+          <a:p/>
+        </p:txBody>
       </p:sp>
       <p:sp>
         <p:nvSpPr>
@@ -27272,6 +28045,10 @@
             <a:prstDash val="solid"/>
           </a:ln>
         </p:spPr>
+        <p:txBody>
+          <a:bodyPr/>
+          <a:p/>
+        </p:txBody>
       </p:sp>
       <p:sp>
         <p:nvSpPr>
@@ -27377,6 +28154,10 @@
             <a:prstDash val="solid"/>
           </a:ln>
         </p:spPr>
+        <p:txBody>
+          <a:bodyPr/>
+          <a:p/>
+        </p:txBody>
       </p:sp>
       <p:sp>
         <p:nvSpPr>
@@ -27401,6 +28182,10 @@
             <a:prstDash val="solid"/>
           </a:ln>
         </p:spPr>
+        <p:txBody>
+          <a:bodyPr/>
+          <a:p/>
+        </p:txBody>
       </p:sp>
       <p:sp>
         <p:nvSpPr>
@@ -27619,6 +28404,10 @@
           </a:solidFill>
           <a:ln/>
         </p:spPr>
+        <p:txBody>
+          <a:bodyPr/>
+          <a:p/>
+        </p:txBody>
       </p:sp>
       <p:sp>
         <p:nvSpPr>
@@ -27771,6 +28560,10 @@
           </a:solidFill>
           <a:ln/>
         </p:spPr>
+        <p:txBody>
+          <a:bodyPr/>
+          <a:p/>
+        </p:txBody>
       </p:sp>
       <p:sp>
         <p:nvSpPr>
@@ -27923,6 +28716,10 @@
           </a:solidFill>
           <a:ln/>
         </p:spPr>
+        <p:txBody>
+          <a:bodyPr/>
+          <a:p/>
+        </p:txBody>
       </p:sp>
       <p:sp>
         <p:nvSpPr>
@@ -28075,6 +28872,10 @@
           </a:solidFill>
           <a:ln/>
         </p:spPr>
+        <p:txBody>
+          <a:bodyPr/>
+          <a:p/>
+        </p:txBody>
       </p:sp>
       <p:sp>
         <p:nvSpPr>
@@ -28227,6 +29028,10 @@
           </a:solidFill>
           <a:ln/>
         </p:spPr>
+        <p:txBody>
+          <a:bodyPr/>
+          <a:p/>
+        </p:txBody>
       </p:sp>
       <p:sp>
         <p:nvSpPr>
@@ -28379,6 +29184,10 @@
           </a:solidFill>
           <a:ln/>
         </p:spPr>
+        <p:txBody>
+          <a:bodyPr/>
+          <a:p/>
+        </p:txBody>
       </p:sp>
       <p:sp>
         <p:nvSpPr>
@@ -28819,6 +29628,10 @@
           </a:solidFill>
           <a:ln/>
         </p:spPr>
+        <p:txBody>
+          <a:bodyPr/>
+          <a:p/>
+        </p:txBody>
       </p:sp>
       <p:sp>
         <p:nvSpPr>
@@ -28946,7 +29759,7 @@
                 <a:ea typeface="Arial" pitchFamily="34" charset="-122"/>
                 <a:cs typeface="Arial" pitchFamily="34" charset="-120"/>
               </a:rPr>
-              <a:t>54 Victorian drownings in 2023–24</a:t>
+              <a:t>52 Victorian drownings in 2024–25</a:t>
             </a:r>
             <a:endParaRPr lang="en-US" sz="1650" dirty="0"/>
           </a:p>
@@ -28966,7 +29779,7 @@
                 <a:ea typeface="Arial" pitchFamily="34" charset="-122"/>
                 <a:cs typeface="Arial" pitchFamily="34" charset="-120"/>
               </a:rPr>
-              <a:t>1 in 5 victims aged 15–24</a:t>
+              <a:t>About 1 in 8 victims aged 15–24</a:t>
             </a:r>
             <a:endParaRPr lang="en-US" sz="1650" dirty="0"/>
           </a:p>
@@ -28986,7 +29799,7 @@
                 <a:ea typeface="Arial" pitchFamily="34" charset="-122"/>
                 <a:cs typeface="Arial" pitchFamily="34" charset="-120"/>
               </a:rPr>
-              <a:t>Zero deaths at patrolled sites</a:t>
+              <a:t>Zero deaths in public pools</a:t>
             </a:r>
             <a:endParaRPr lang="en-US" sz="1650" dirty="0"/>
           </a:p>
@@ -29031,6 +29844,10 @@
           </a:solidFill>
           <a:ln/>
         </p:spPr>
+        <p:txBody>
+          <a:bodyPr/>
+          <a:p/>
+        </p:txBody>
       </p:sp>
       <p:sp>
         <p:nvSpPr>
@@ -29243,6 +30060,10 @@
           </a:solidFill>
           <a:ln/>
         </p:spPr>
+        <p:txBody>
+          <a:bodyPr/>
+          <a:p/>
+        </p:txBody>
       </p:sp>
       <p:sp>
         <p:nvSpPr>
@@ -29455,6 +30276,10 @@
           </a:solidFill>
           <a:ln/>
         </p:spPr>
+        <p:txBody>
+          <a:bodyPr/>
+          <a:p/>
+        </p:txBody>
       </p:sp>
       <p:sp>
         <p:nvSpPr>
@@ -29667,6 +30492,10 @@
           </a:solidFill>
           <a:ln/>
         </p:spPr>
+        <p:txBody>
+          <a:bodyPr/>
+          <a:p/>
+        </p:txBody>
       </p:sp>
       <p:sp>
         <p:nvSpPr>
@@ -29857,6 +30686,212 @@
               <a:t>Credible sources only</a:t>
             </a:r>
             <a:endParaRPr lang="en-US" sz="1650" dirty="0"/>
+          </a:p>
+        </p:txBody>
+      </p:sp>
+    </p:spTree>
+  </p:cSld>
+  <p:clrMapOvr>
+    <a:masterClrMapping/>
+  </p:clrMapOvr>
+</p:sld>
+</file>
+
+<file path=ppt/slides/slide41.xml><?xml version="1.0" encoding="utf-8"?>
+<p:sld xmlns:a="http://schemas.openxmlformats.org/drawingml/2006/main" xmlns:p="http://schemas.openxmlformats.org/presentationml/2006/main" xmlns:r="http://schemas.openxmlformats.org/officeDocument/2006/relationships">
+  <p:cSld>
+    <p:spTree>
+      <p:nvGrpSpPr>
+        <p:cNvPr id="1" name=""/>
+        <p:cNvGrpSpPr/>
+        <p:nvPr/>
+      </p:nvGrpSpPr>
+      <p:grpSpPr/>
+      <p:sp>
+        <p:nvSpPr>
+          <p:cNvPr id="2" name="TextBox 1"/>
+          <p:cNvSpPr txBox="1"/>
+          <p:nvPr/>
+        </p:nvSpPr>
+        <p:spPr>
+          <a:xfrm>
+            <a:off x="640080" y="640080"/>
+            <a:ext cx="17007840" cy="9006840"/>
+          </a:xfrm>
+          <a:prstGeom prst="rect">
+            <a:avLst/>
+          </a:prstGeom>
+          <a:noFill/>
+        </p:spPr>
+        <p:txBody>
+          <a:bodyPr wrap="square">
+            <a:spAutoFit/>
+          </a:bodyPr>
+          <a:lstStyle/>
+          <a:p>
+            <a:pPr>
+              <a:spcAft>
+                <a:spcPts val="1400"/>
+              </a:spcAft>
+            </a:pPr>
+            <a:r>
+              <a:rPr sz="2600" b="1">
+                <a:solidFill>
+                  <a:srgbClr val="0A1E3D"/>
+                </a:solidFill>
+              </a:rPr>
+              <a:t>Licence &amp; Attribution</a:t>
+            </a:r>
+          </a:p>
+          <a:p>
+            <a:pPr>
+              <a:spcAft>
+                <a:spcPts val="1000"/>
+              </a:spcAft>
+            </a:pPr>
+            <a:r>
+              <a:rPr sz="1400" b="1">
+                <a:solidFill>
+                  <a:srgbClr val="1565C0"/>
+                </a:solidFill>
+              </a:rPr>
+              <a:t>© 2026 Emilie Harrison — Swim &amp; Water Safety Teaching Hub</a:t>
+            </a:r>
+          </a:p>
+          <a:p>
+            <a:pPr>
+              <a:spcAft>
+                <a:spcPts val="1000"/>
+              </a:spcAft>
+            </a:pPr>
+            <a:r>
+              <a:rPr sz="1200" b="0">
+                <a:solidFill>
+                  <a:srgbClr val="1A2840"/>
+                </a:solidFill>
+              </a:rPr>
+              <a:t>Licensed under Creative Commons Attribution 4.0 International (CC BY 4.0). You are free to copy, adapt, remix and redistribute this deck — including commercially — provided you credit the author and indicate any changes.</a:t>
+            </a:r>
+          </a:p>
+          <a:p>
+            <a:pPr>
+              <a:spcAft>
+                <a:spcPts val="1000"/>
+              </a:spcAft>
+            </a:pPr>
+            <a:r>
+              <a:rPr sz="1100" b="0">
+                <a:solidFill>
+                  <a:srgbClr val="5A6E8A"/>
+                </a:solidFill>
+              </a:rPr>
+              <a:t>Attribution: "Swim &amp; Water Safety Teaching Hub" by Emilie Harrison, CC BY 4.0. Source: emilie-harrison.github.io/swim-water-safety</a:t>
+            </a:r>
+          </a:p>
+          <a:p>
+            <a:pPr>
+              <a:spcAft>
+                <a:spcPts val="1000"/>
+              </a:spcAft>
+            </a:pPr>
+            <a:r>
+              <a:rPr sz="1100" b="0">
+                <a:solidFill>
+                  <a:srgbClr val="5A6E8A"/>
+                </a:solidFill>
+              </a:rPr>
+              <a:t>Third-party material is not covered by this licence. Content owned by Life Saving Victoria, Royal Life Saving Australia, Surf Life Saving Australia, VCAA, ACARA, AIATSIS and the Australian Resuscitation Council — including drowning data, clinical guidelines, curriculum content, logos and program names — remains with its owners.</a:t>
+            </a:r>
+          </a:p>
+          <a:p>
+            <a:pPr>
+              <a:spcAft>
+                <a:spcPts val="1000"/>
+              </a:spcAft>
+            </a:pPr>
+            <a:r>
+              <a:rPr sz="1000" b="0">
+                <a:solidFill>
+                  <a:srgbClr val="5A6E8A"/>
+                </a:solidFill>
+              </a:rPr>
+              <a:t>Statistics: Life Saving Victoria, Victorian Drowning Report 2024–25. Deck updated September 2026.</a:t>
+            </a:r>
+          </a:p>
+          <a:p>
+            <a:pPr>
+              <a:spcAft>
+                <a:spcPts val="300"/>
+              </a:spcAft>
+            </a:pPr>
+            <a:r>
+              <a:rPr sz="1000">
+                <a:solidFill>
+                  <a:srgbClr val="5A6E8A"/>
+                </a:solidFill>
+              </a:rPr>
+              <a:t>Data sources cited in this deck — retain these citations if you adapt it:</a:t>
+            </a:r>
+          </a:p>
+          <a:p>
+            <a:pPr>
+              <a:spcAft>
+                <a:spcPts val="300"/>
+              </a:spcAft>
+            </a:pPr>
+            <a:r>
+              <a:rPr sz="1000">
+                <a:solidFill>
+                  <a:srgbClr val="5A6E8A"/>
+                </a:solidFill>
+              </a:rPr>
+              <a:t>• Life Saving Victoria. (2025). Victorian Drowning Report 2024–25. Life Saving Victoria: Melbourne.</a:t>
+            </a:r>
+          </a:p>
+          <a:p>
+            <a:pPr>
+              <a:spcAft>
+                <a:spcPts val="300"/>
+              </a:spcAft>
+            </a:pPr>
+            <a:r>
+              <a:rPr sz="1000">
+                <a:solidFill>
+                  <a:srgbClr val="5A6E8A"/>
+                </a:solidFill>
+              </a:rPr>
+              <a:t>• Royal Life Saving Australia (2026). National Drowning Report 2026. RLSSA: Sydney.</a:t>
+            </a:r>
+          </a:p>
+          <a:p>
+            <a:pPr>
+              <a:spcAft>
+                <a:spcPts val="300"/>
+              </a:spcAft>
+            </a:pPr>
+            <a:r>
+              <a:rPr sz="1000">
+                <a:solidFill>
+                  <a:srgbClr val="5A6E8A"/>
+                </a:solidFill>
+              </a:rPr>
+              <a:t>• Surf Life Saving Australia (2026). Summer Coastal Drowning Report 2025/26. SLSA: Sydney.</a:t>
+            </a:r>
+          </a:p>
+          <a:p>
+            <a:pPr>
+              <a:spcAft>
+                <a:spcPts val="300"/>
+              </a:spcAft>
+            </a:pPr>
+            <a:r>
+              <a:rPr sz="1000">
+                <a:solidFill>
+                  <a:srgbClr val="5A6E8A"/>
+                </a:solidFill>
+              </a:rPr>
+              <a:t>These figures remain the property of the publishing organisations.</a:t>
+            </a:r>
           </a:p>
         </p:txBody>
       </p:sp>
@@ -29930,7 +30965,7 @@
                 <a:ea typeface="Courier New" pitchFamily="34" charset="-122"/>
                 <a:cs typeface="Courier New" pitchFamily="34" charset="-120"/>
               </a:rPr>
-              <a:t>VICTORIA · 2023–24 · LIFE SAVING VICTORIA REPORT</a:t>
+              <a:t>VICTORIA · 2024–25 · LIFE SAVING VICTORIA REPORT</a:t>
             </a:r>
             <a:endParaRPr lang="en-US" sz="1800" dirty="0"/>
           </a:p>
@@ -30006,6 +31041,10 @@
             <a:prstDash val="solid"/>
           </a:ln>
         </p:spPr>
+        <p:txBody>
+          <a:bodyPr/>
+          <a:p/>
+        </p:txBody>
       </p:sp>
       <p:sp>
         <p:nvSpPr>
@@ -30089,7 +31128,7 @@
                 <a:ea typeface="Arial" pitchFamily="34" charset="-122"/>
                 <a:cs typeface="Arial" pitchFamily="34" charset="-120"/>
               </a:rPr>
-              <a:t>54</a:t>
+              <a:t>52</a:t>
             </a:r>
             <a:endParaRPr lang="en-US" sz="10500" dirty="0"/>
           </a:p>
@@ -30165,6 +31204,10 @@
             <a:prstDash val="solid"/>
           </a:ln>
         </p:spPr>
+        <p:txBody>
+          <a:bodyPr/>
+          <a:p/>
+        </p:txBody>
       </p:sp>
       <p:sp>
         <p:nvSpPr>
@@ -30248,7 +31291,7 @@
                 <a:ea typeface="Arial" pitchFamily="34" charset="-122"/>
                 <a:cs typeface="Arial" pitchFamily="34" charset="-120"/>
               </a:rPr>
-              <a:t>1 in 5</a:t>
+              <a:t>about 1 in 8</a:t>
             </a:r>
             <a:endParaRPr lang="en-US" sz="10500" dirty="0"/>
           </a:p>
@@ -30324,6 +31367,10 @@
             <a:prstDash val="solid"/>
           </a:ln>
         </p:spPr>
+        <p:txBody>
+          <a:bodyPr/>
+          <a:p/>
+        </p:txBody>
       </p:sp>
       <p:sp>
         <p:nvSpPr>
@@ -30451,7 +31498,7 @@
                 <a:ea typeface="Arial" pitchFamily="34" charset="-122"/>
                 <a:cs typeface="Arial" pitchFamily="34" charset="-120"/>
               </a:rPr>
-              <a:t>Of 54 — males drown about 4× as often as females.</a:t>
+              <a:t>Of 52 — 38 male, 14 female.</a:t>
             </a:r>
             <a:endParaRPr lang="en-US" sz="1800" dirty="0"/>
           </a:p>
@@ -30483,6 +31530,10 @@
             <a:prstDash val="solid"/>
           </a:ln>
         </p:spPr>
+        <p:txBody>
+          <a:bodyPr/>
+          <a:p/>
+        </p:txBody>
       </p:sp>
       <p:sp>
         <p:nvSpPr>
@@ -30610,7 +31661,7 @@
                 <a:ea typeface="Arial" pitchFamily="34" charset="-122"/>
                 <a:cs typeface="Arial" pitchFamily="34" charset="-120"/>
               </a:rPr>
-              <a:t>Zero of the 54 deaths happened between the flags.</a:t>
+              <a:t>Zero deaths in public swimming pools — first time since 2019–20.</a:t>
             </a:r>
             <a:endParaRPr lang="en-US" sz="1800" dirty="0"/>
           </a:p>
@@ -30654,7 +31705,7 @@
                 <a:ea typeface="Courier New" pitchFamily="34" charset="-122"/>
                 <a:cs typeface="Courier New" pitchFamily="34" charset="-120"/>
               </a:rPr>
-              <a:t>Source · LSV Victorian Drowning Report 2023–24</a:t>
+              <a:t>Source · LSV Victorian Drowning Report 2024–25</a:t>
             </a:r>
             <a:endParaRPr lang="en-US" sz="1800" dirty="0"/>
           </a:p>
@@ -30879,7 +31930,7 @@
                 <a:ea typeface="Arial" pitchFamily="34" charset="-122"/>
                 <a:cs typeface="Arial" pitchFamily="34" charset="-120"/>
               </a:rPr>
-              <a:t>of Victorian drownings in 2023–24 were people aged 15 to 24. That's the age group most of us will be in within five years.</a:t>
+              <a:t>of Victorian drownings in 2024–25 were people aged 15 to 24. That's the age group most of us will be in within five years.</a:t>
             </a:r>
             <a:endParaRPr lang="en-US" sz="4200" dirty="0"/>
           </a:p>
@@ -31421,7 +32472,7 @@
                 <a:ea typeface="Courier New" pitchFamily="34" charset="-122"/>
                 <a:cs typeface="Courier New" pitchFamily="34" charset="-120"/>
               </a:rPr>
-              <a:t>Source · LSV Victorian Drowning Report 2023–24</a:t>
+              <a:t>Source · LSV Victorian Drowning Report 2024–25</a:t>
             </a:r>
             <a:endParaRPr lang="en-US" sz="1800" dirty="0"/>
           </a:p>
@@ -31610,6 +32661,10 @@
           </a:solidFill>
           <a:ln/>
         </p:spPr>
+        <p:txBody>
+          <a:bodyPr/>
+          <a:p/>
+        </p:txBody>
       </p:sp>
       <p:sp>
         <p:nvSpPr>
@@ -31762,6 +32817,10 @@
           </a:solidFill>
           <a:ln/>
         </p:spPr>
+        <p:txBody>
+          <a:bodyPr/>
+          <a:p/>
+        </p:txBody>
       </p:sp>
       <p:sp>
         <p:nvSpPr>
@@ -31914,6 +32973,10 @@
           </a:solidFill>
           <a:ln/>
         </p:spPr>
+        <p:txBody>
+          <a:bodyPr/>
+          <a:p/>
+        </p:txBody>
       </p:sp>
       <p:sp>
         <p:nvSpPr>
@@ -32066,6 +33129,10 @@
           </a:solidFill>
           <a:ln/>
         </p:spPr>
+        <p:txBody>
+          <a:bodyPr/>
+          <a:p/>
+        </p:txBody>
       </p:sp>
       <p:sp>
         <p:nvSpPr>
@@ -32359,7 +33426,7 @@
                 <a:ea typeface="Arial" pitchFamily="34" charset="-122"/>
                 <a:cs typeface="Arial" pitchFamily="34" charset="-120"/>
               </a:rPr>
-              <a:t>In 2023–24, </a:t>
+              <a:t>In 2024–25, Victoria recorded zero drowning deaths in public swimming pools — the first time since 2019–20. But 25% of deaths happened in home environments, where no lifeguard can reach.</a:t>
             </a:r>
             <a:pPr algn="l" indent="0" marL="0">
               <a:lnSpc>
@@ -32376,7 +33443,7 @@
                 <a:ea typeface="Arial" pitchFamily="34" charset="-122"/>
                 <a:cs typeface="Arial" pitchFamily="34" charset="-120"/>
               </a:rPr>
-              <a:t>zero </a:t>
+              <a:t/>
             </a:r>
             <a:pPr algn="l" indent="0" marL="0">
               <a:lnSpc>
@@ -32395,7 +33462,7 @@
                 <a:ea typeface="Arial" pitchFamily="34" charset="-122"/>
                 <a:cs typeface="Arial" pitchFamily="34" charset="-120"/>
               </a:rPr>
-              <a:t>of the 54 Victorian drowning deaths happened at a patrolled location.</a:t>
+              <a:t/>
             </a:r>
             <a:endParaRPr lang="en-US" sz="3000" dirty="0"/>
           </a:p>
@@ -32441,7 +33508,7 @@
                 <a:ea typeface="Courier New" pitchFamily="34" charset="-122"/>
                 <a:cs typeface="Courier New" pitchFamily="34" charset="-120"/>
               </a:rPr>
-              <a:t>Source · LSV Victorian Drowning Report 2023–24</a:t>
+              <a:t>Source · LSV Victorian Drowning Report 2024–25</a:t>
             </a:r>
             <a:endParaRPr lang="en-US" sz="1800" dirty="0"/>
           </a:p>

--- a/Swim_Water_Safety_Years_7-8.pptx
+++ b/Swim_Water_Safety_Years_7-8.pptx
@@ -45,7 +45,6 @@
     <p:sldId id="293" r:id="rId39"/>
     <p:sldId id="294" r:id="rId40"/>
     <p:sldId id="295" r:id="rId41"/>
-    <p:sldId id="296" r:id="rId47"/>
   </p:sldIdLst>
   <p:notesMasterIdLst>
     <p:notesMasterId r:id="rId42"/>
@@ -4359,10 +4358,6 @@
           </a:solidFill>
           <a:ln/>
         </p:spPr>
-        <p:txBody>
-          <a:bodyPr/>
-          <a:p/>
-        </p:txBody>
       </p:sp>
       <p:sp>
         <p:nvSpPr>
@@ -4385,10 +4380,6 @@
           </a:solidFill>
           <a:ln/>
         </p:spPr>
-        <p:txBody>
-          <a:bodyPr/>
-          <a:p/>
-        </p:txBody>
       </p:sp>
       <p:sp>
         <p:nvSpPr>
@@ -4411,10 +4402,6 @@
           </a:solidFill>
           <a:ln/>
         </p:spPr>
-        <p:txBody>
-          <a:bodyPr/>
-          <a:p/>
-        </p:txBody>
       </p:sp>
       <p:sp>
         <p:nvSpPr>
@@ -4597,10 +4584,6 @@
             <a:prstDash val="solid"/>
           </a:ln>
         </p:spPr>
-        <p:txBody>
-          <a:bodyPr/>
-          <a:p/>
-        </p:txBody>
       </p:sp>
       <p:sp>
         <p:nvSpPr>
@@ -4678,10 +4661,6 @@
             <a:prstDash val="solid"/>
           </a:ln>
         </p:spPr>
-        <p:txBody>
-          <a:bodyPr/>
-          <a:p/>
-        </p:txBody>
       </p:sp>
       <p:sp>
         <p:nvSpPr>
@@ -4759,10 +4738,6 @@
             <a:prstDash val="solid"/>
           </a:ln>
         </p:spPr>
-        <p:txBody>
-          <a:bodyPr/>
-          <a:p/>
-        </p:txBody>
       </p:sp>
       <p:sp>
         <p:nvSpPr>
@@ -4829,10 +4804,6 @@
           </a:solidFill>
           <a:ln/>
         </p:spPr>
-        <p:txBody>
-          <a:bodyPr/>
-          <a:p/>
-        </p:txBody>
       </p:sp>
     </p:spTree>
   </p:cSld>
@@ -5234,10 +5205,6 @@
             <a:prstDash val="solid"/>
           </a:ln>
         </p:spPr>
-        <p:txBody>
-          <a:bodyPr/>
-          <a:p/>
-        </p:txBody>
       </p:sp>
       <p:sp>
         <p:nvSpPr>
@@ -5315,10 +5282,6 @@
             <a:prstDash val="solid"/>
           </a:ln>
         </p:spPr>
-        <p:txBody>
-          <a:bodyPr/>
-          <a:p/>
-        </p:txBody>
       </p:sp>
       <p:sp>
         <p:nvSpPr>
@@ -5512,10 +5475,6 @@
             <a:prstDash val="solid"/>
           </a:ln>
         </p:spPr>
-        <p:txBody>
-          <a:bodyPr/>
-          <a:p/>
-        </p:txBody>
       </p:sp>
       <p:sp>
         <p:nvSpPr>
@@ -5536,10 +5495,6 @@
           </a:solidFill>
           <a:ln/>
         </p:spPr>
-        <p:txBody>
-          <a:bodyPr/>
-          <a:p/>
-        </p:txBody>
       </p:sp>
       <p:sp>
         <p:nvSpPr>
@@ -5560,10 +5515,6 @@
           </a:solidFill>
           <a:ln/>
         </p:spPr>
-        <p:txBody>
-          <a:bodyPr/>
-          <a:p/>
-        </p:txBody>
       </p:sp>
       <p:sp>
         <p:nvSpPr>
@@ -5696,10 +5647,6 @@
             <a:prstDash val="solid"/>
           </a:ln>
         </p:spPr>
-        <p:txBody>
-          <a:bodyPr/>
-          <a:p/>
-        </p:txBody>
       </p:sp>
       <p:sp>
         <p:nvSpPr>
@@ -5720,10 +5667,6 @@
           </a:solidFill>
           <a:ln/>
         </p:spPr>
-        <p:txBody>
-          <a:bodyPr/>
-          <a:p/>
-        </p:txBody>
       </p:sp>
       <p:sp>
         <p:nvSpPr>
@@ -5744,10 +5687,6 @@
           </a:solidFill>
           <a:ln/>
         </p:spPr>
-        <p:txBody>
-          <a:bodyPr/>
-          <a:p/>
-        </p:txBody>
       </p:sp>
       <p:sp>
         <p:nvSpPr>
@@ -5880,10 +5819,6 @@
             <a:prstDash val="solid"/>
           </a:ln>
         </p:spPr>
-        <p:txBody>
-          <a:bodyPr/>
-          <a:p/>
-        </p:txBody>
       </p:sp>
       <p:sp>
         <p:nvSpPr>
@@ -5904,10 +5839,6 @@
           </a:solidFill>
           <a:ln/>
         </p:spPr>
-        <p:txBody>
-          <a:bodyPr/>
-          <a:p/>
-        </p:txBody>
       </p:sp>
       <p:sp>
         <p:nvSpPr>
@@ -5928,10 +5859,6 @@
           </a:solidFill>
           <a:ln/>
         </p:spPr>
-        <p:txBody>
-          <a:bodyPr/>
-          <a:p/>
-        </p:txBody>
       </p:sp>
       <p:sp>
         <p:nvSpPr>
@@ -5952,10 +5879,6 @@
           </a:solidFill>
           <a:ln/>
         </p:spPr>
-        <p:txBody>
-          <a:bodyPr/>
-          <a:p/>
-        </p:txBody>
       </p:sp>
       <p:sp>
         <p:nvSpPr>
@@ -5976,10 +5899,6 @@
           </a:solidFill>
           <a:ln/>
         </p:spPr>
-        <p:txBody>
-          <a:bodyPr/>
-          <a:p/>
-        </p:txBody>
       </p:sp>
       <p:sp>
         <p:nvSpPr>
@@ -6000,10 +5919,6 @@
           </a:solidFill>
           <a:ln/>
         </p:spPr>
-        <p:txBody>
-          <a:bodyPr/>
-          <a:p/>
-        </p:txBody>
       </p:sp>
       <p:sp>
         <p:nvSpPr>
@@ -6024,10 +5939,6 @@
           </a:solidFill>
           <a:ln/>
         </p:spPr>
-        <p:txBody>
-          <a:bodyPr/>
-          <a:p/>
-        </p:txBody>
       </p:sp>
       <p:sp>
         <p:nvSpPr>
@@ -6160,10 +6071,6 @@
             <a:prstDash val="solid"/>
           </a:ln>
         </p:spPr>
-        <p:txBody>
-          <a:bodyPr/>
-          <a:p/>
-        </p:txBody>
       </p:sp>
       <p:sp>
         <p:nvSpPr>
@@ -6184,10 +6091,6 @@
           </a:solidFill>
           <a:ln/>
         </p:spPr>
-        <p:txBody>
-          <a:bodyPr/>
-          <a:p/>
-        </p:txBody>
       </p:sp>
       <p:sp>
         <p:nvSpPr>
@@ -6208,10 +6111,6 @@
           </a:solidFill>
           <a:ln/>
         </p:spPr>
-        <p:txBody>
-          <a:bodyPr/>
-          <a:p/>
-        </p:txBody>
       </p:sp>
       <p:sp>
         <p:nvSpPr>
@@ -6344,10 +6243,6 @@
             <a:prstDash val="solid"/>
           </a:ln>
         </p:spPr>
-        <p:txBody>
-          <a:bodyPr/>
-          <a:p/>
-        </p:txBody>
       </p:sp>
       <p:sp>
         <p:nvSpPr>
@@ -6368,10 +6263,6 @@
           </a:solidFill>
           <a:ln/>
         </p:spPr>
-        <p:txBody>
-          <a:bodyPr/>
-          <a:p/>
-        </p:txBody>
       </p:sp>
       <p:sp>
         <p:nvSpPr>
@@ -6392,10 +6283,6 @@
           </a:solidFill>
           <a:ln/>
         </p:spPr>
-        <p:txBody>
-          <a:bodyPr/>
-          <a:p/>
-        </p:txBody>
       </p:sp>
       <p:sp>
         <p:nvSpPr>
@@ -6528,10 +6415,6 @@
             <a:prstDash val="solid"/>
           </a:ln>
         </p:spPr>
-        <p:txBody>
-          <a:bodyPr/>
-          <a:p/>
-        </p:txBody>
       </p:sp>
       <p:sp>
         <p:nvSpPr>
@@ -6552,10 +6435,6 @@
           </a:solidFill>
           <a:ln/>
         </p:spPr>
-        <p:txBody>
-          <a:bodyPr/>
-          <a:p/>
-        </p:txBody>
       </p:sp>
       <p:sp>
         <p:nvSpPr>
@@ -6576,10 +6455,6 @@
           </a:solidFill>
           <a:ln/>
         </p:spPr>
-        <p:txBody>
-          <a:bodyPr/>
-          <a:p/>
-        </p:txBody>
       </p:sp>
       <p:sp>
         <p:nvSpPr>
@@ -6827,10 +6702,6 @@
           </a:solidFill>
           <a:ln/>
         </p:spPr>
-        <p:txBody>
-          <a:bodyPr/>
-          <a:p/>
-        </p:txBody>
       </p:sp>
       <p:pic>
         <p:nvPicPr>
@@ -6886,10 +6757,6 @@
             <a:prstDash val="solid"/>
           </a:ln>
         </p:spPr>
-        <p:txBody>
-          <a:bodyPr/>
-          <a:p/>
-        </p:txBody>
       </p:sp>
       <p:sp>
         <p:nvSpPr>
@@ -7009,10 +6876,6 @@
             <a:prstDash val="solid"/>
           </a:ln>
         </p:spPr>
-        <p:txBody>
-          <a:bodyPr/>
-          <a:p/>
-        </p:txBody>
       </p:sp>
       <p:sp>
         <p:nvSpPr>
@@ -7132,10 +6995,6 @@
             <a:prstDash val="solid"/>
           </a:ln>
         </p:spPr>
-        <p:txBody>
-          <a:bodyPr/>
-          <a:p/>
-        </p:txBody>
       </p:sp>
       <p:sp>
         <p:nvSpPr>
@@ -7255,10 +7114,6 @@
             <a:prstDash val="solid"/>
           </a:ln>
         </p:spPr>
-        <p:txBody>
-          <a:bodyPr/>
-          <a:p/>
-        </p:txBody>
       </p:sp>
       <p:sp>
         <p:nvSpPr>
@@ -7378,10 +7233,6 @@
             <a:prstDash val="solid"/>
           </a:ln>
         </p:spPr>
-        <p:txBody>
-          <a:bodyPr/>
-          <a:p/>
-        </p:txBody>
       </p:sp>
       <p:sp>
         <p:nvSpPr>
@@ -7610,10 +7461,6 @@
           </a:solidFill>
           <a:ln/>
         </p:spPr>
-        <p:txBody>
-          <a:bodyPr/>
-          <a:p/>
-        </p:txBody>
       </p:sp>
       <p:sp>
         <p:nvSpPr>
@@ -7766,10 +7613,6 @@
           </a:solidFill>
           <a:ln/>
         </p:spPr>
-        <p:txBody>
-          <a:bodyPr/>
-          <a:p/>
-        </p:txBody>
       </p:sp>
       <p:sp>
         <p:nvSpPr>
@@ -7922,10 +7765,6 @@
           </a:solidFill>
           <a:ln/>
         </p:spPr>
-        <p:txBody>
-          <a:bodyPr/>
-          <a:p/>
-        </p:txBody>
       </p:sp>
       <p:sp>
         <p:nvSpPr>
@@ -8078,10 +7917,6 @@
           </a:solidFill>
           <a:ln/>
         </p:spPr>
-        <p:txBody>
-          <a:bodyPr/>
-          <a:p/>
-        </p:txBody>
       </p:sp>
       <p:sp>
         <p:nvSpPr>
@@ -8234,10 +8069,6 @@
           </a:solidFill>
           <a:ln/>
         </p:spPr>
-        <p:txBody>
-          <a:bodyPr/>
-          <a:p/>
-        </p:txBody>
       </p:sp>
       <p:sp>
         <p:nvSpPr>
@@ -8517,10 +8348,6 @@
             </a:outerShdw>
           </a:effectLst>
         </p:spPr>
-        <p:txBody>
-          <a:bodyPr/>
-          <a:p/>
-        </p:txBody>
       </p:sp>
       <p:sp>
         <p:nvSpPr>
@@ -8541,10 +8368,6 @@
           </a:solidFill>
           <a:ln/>
         </p:spPr>
-        <p:txBody>
-          <a:bodyPr/>
-          <a:p/>
-        </p:txBody>
       </p:sp>
       <p:sp>
         <p:nvSpPr>
@@ -8677,10 +8500,6 @@
             <a:prstDash val="solid"/>
           </a:ln>
         </p:spPr>
-        <p:txBody>
-          <a:bodyPr/>
-          <a:p/>
-        </p:txBody>
       </p:sp>
       <p:sp>
         <p:nvSpPr>
@@ -8949,10 +8768,6 @@
           </a:solidFill>
           <a:ln/>
         </p:spPr>
-        <p:txBody>
-          <a:bodyPr/>
-          <a:p/>
-        </p:txBody>
       </p:sp>
       <p:sp>
         <p:nvSpPr>
@@ -9105,10 +8920,6 @@
           </a:solidFill>
           <a:ln/>
         </p:spPr>
-        <p:txBody>
-          <a:bodyPr/>
-          <a:p/>
-        </p:txBody>
       </p:sp>
       <p:sp>
         <p:nvSpPr>
@@ -9261,10 +9072,6 @@
           </a:solidFill>
           <a:ln/>
         </p:spPr>
-        <p:txBody>
-          <a:bodyPr/>
-          <a:p/>
-        </p:txBody>
       </p:sp>
       <p:sp>
         <p:nvSpPr>
@@ -9798,10 +9605,6 @@
             <a:prstDash val="solid"/>
           </a:ln>
         </p:spPr>
-        <p:txBody>
-          <a:bodyPr/>
-          <a:p/>
-        </p:txBody>
       </p:sp>
       <p:sp>
         <p:nvSpPr>
@@ -9879,10 +9682,6 @@
             <a:prstDash val="solid"/>
           </a:ln>
         </p:spPr>
-        <p:txBody>
-          <a:bodyPr/>
-          <a:p/>
-        </p:txBody>
       </p:sp>
       <p:sp>
         <p:nvSpPr>
@@ -9960,10 +9759,6 @@
             <a:prstDash val="solid"/>
           </a:ln>
         </p:spPr>
-        <p:txBody>
-          <a:bodyPr/>
-          <a:p/>
-        </p:txBody>
       </p:sp>
       <p:sp>
         <p:nvSpPr>
@@ -10377,10 +10172,6 @@
             <a:prstDash val="solid"/>
           </a:ln>
         </p:spPr>
-        <p:txBody>
-          <a:bodyPr/>
-          <a:p/>
-        </p:txBody>
       </p:sp>
       <p:sp>
         <p:nvSpPr>
@@ -10496,10 +10287,6 @@
             <a:prstDash val="solid"/>
           </a:ln>
         </p:spPr>
-        <p:txBody>
-          <a:bodyPr/>
-          <a:p/>
-        </p:txBody>
       </p:sp>
       <p:sp>
         <p:nvSpPr>
@@ -10615,10 +10402,6 @@
             <a:prstDash val="solid"/>
           </a:ln>
         </p:spPr>
-        <p:txBody>
-          <a:bodyPr/>
-          <a:p/>
-        </p:txBody>
       </p:sp>
       <p:sp>
         <p:nvSpPr>
@@ -10734,10 +10517,6 @@
             <a:prstDash val="solid"/>
           </a:ln>
         </p:spPr>
-        <p:txBody>
-          <a:bodyPr/>
-          <a:p/>
-        </p:txBody>
       </p:sp>
       <p:sp>
         <p:nvSpPr>
@@ -11012,10 +10791,6 @@
           </a:solidFill>
           <a:ln/>
         </p:spPr>
-        <p:txBody>
-          <a:bodyPr/>
-          <a:p/>
-        </p:txBody>
       </p:sp>
       <p:sp>
         <p:nvSpPr>
@@ -11220,10 +10995,6 @@
           </a:solidFill>
           <a:ln/>
         </p:spPr>
-        <p:txBody>
-          <a:bodyPr/>
-          <a:p/>
-        </p:txBody>
       </p:sp>
       <p:sp>
         <p:nvSpPr>
@@ -11428,10 +11199,6 @@
           </a:solidFill>
           <a:ln/>
         </p:spPr>
-        <p:txBody>
-          <a:bodyPr/>
-          <a:p/>
-        </p:txBody>
       </p:sp>
       <p:sp>
         <p:nvSpPr>
@@ -11636,10 +11403,6 @@
           </a:solidFill>
           <a:ln/>
         </p:spPr>
-        <p:txBody>
-          <a:bodyPr/>
-          <a:p/>
-        </p:txBody>
       </p:sp>
       <p:sp>
         <p:nvSpPr>
@@ -11844,10 +11607,6 @@
           </a:solidFill>
           <a:ln/>
         </p:spPr>
-        <p:txBody>
-          <a:bodyPr/>
-          <a:p/>
-        </p:txBody>
       </p:sp>
       <p:sp>
         <p:nvSpPr>
@@ -12170,10 +11929,6 @@
           </a:solidFill>
           <a:ln/>
         </p:spPr>
-        <p:txBody>
-          <a:bodyPr/>
-          <a:p/>
-        </p:txBody>
       </p:sp>
       <p:sp>
         <p:nvSpPr>
@@ -12326,10 +12081,6 @@
           </a:solidFill>
           <a:ln/>
         </p:spPr>
-        <p:txBody>
-          <a:bodyPr/>
-          <a:p/>
-        </p:txBody>
       </p:sp>
       <p:sp>
         <p:nvSpPr>
@@ -12482,10 +12233,6 @@
           </a:solidFill>
           <a:ln/>
         </p:spPr>
-        <p:txBody>
-          <a:bodyPr/>
-          <a:p/>
-        </p:txBody>
       </p:sp>
       <p:sp>
         <p:nvSpPr>
@@ -12638,10 +12385,6 @@
           </a:solidFill>
           <a:ln/>
         </p:spPr>
-        <p:txBody>
-          <a:bodyPr/>
-          <a:p/>
-        </p:txBody>
       </p:sp>
       <p:sp>
         <p:nvSpPr>
@@ -12794,10 +12537,6 @@
           </a:solidFill>
           <a:ln/>
         </p:spPr>
-        <p:txBody>
-          <a:bodyPr/>
-          <a:p/>
-        </p:txBody>
       </p:sp>
       <p:sp>
         <p:nvSpPr>
@@ -13106,10 +12845,6 @@
           </a:solidFill>
           <a:ln/>
         </p:spPr>
-        <p:txBody>
-          <a:bodyPr/>
-          <a:p/>
-        </p:txBody>
       </p:sp>
       <p:sp>
         <p:nvSpPr>
@@ -13222,10 +12957,6 @@
           </a:solidFill>
           <a:ln/>
         </p:spPr>
-        <p:txBody>
-          <a:bodyPr/>
-          <a:p/>
-        </p:txBody>
       </p:sp>
       <p:sp>
         <p:nvSpPr>
@@ -13338,10 +13069,6 @@
           </a:solidFill>
           <a:ln/>
         </p:spPr>
-        <p:txBody>
-          <a:bodyPr/>
-          <a:p/>
-        </p:txBody>
       </p:sp>
       <p:sp>
         <p:nvSpPr>
@@ -13454,10 +13181,6 @@
           </a:solidFill>
           <a:ln/>
         </p:spPr>
-        <p:txBody>
-          <a:bodyPr/>
-          <a:p/>
-        </p:txBody>
       </p:sp>
       <p:sp>
         <p:nvSpPr>
@@ -13570,10 +13293,6 @@
           </a:solidFill>
           <a:ln/>
         </p:spPr>
-        <p:txBody>
-          <a:bodyPr/>
-          <a:p/>
-        </p:txBody>
       </p:sp>
       <p:sp>
         <p:nvSpPr>
@@ -13686,10 +13405,6 @@
           </a:solidFill>
           <a:ln/>
         </p:spPr>
-        <p:txBody>
-          <a:bodyPr/>
-          <a:p/>
-        </p:txBody>
       </p:sp>
       <p:sp>
         <p:nvSpPr>
@@ -13802,10 +13517,6 @@
           </a:solidFill>
           <a:ln/>
         </p:spPr>
-        <p:txBody>
-          <a:bodyPr/>
-          <a:p/>
-        </p:txBody>
       </p:sp>
       <p:sp>
         <p:nvSpPr>
@@ -14148,10 +13859,6 @@
           </a:solidFill>
           <a:ln/>
         </p:spPr>
-        <p:txBody>
-          <a:bodyPr/>
-          <a:p/>
-        </p:txBody>
       </p:sp>
       <p:sp>
         <p:nvSpPr>
@@ -14172,10 +13879,6 @@
           </a:solidFill>
           <a:ln/>
         </p:spPr>
-        <p:txBody>
-          <a:bodyPr/>
-          <a:p/>
-        </p:txBody>
       </p:sp>
       <p:sp>
         <p:nvSpPr>
@@ -14328,10 +14031,6 @@
           </a:solidFill>
           <a:ln/>
         </p:spPr>
-        <p:txBody>
-          <a:bodyPr/>
-          <a:p/>
-        </p:txBody>
       </p:sp>
       <p:sp>
         <p:nvSpPr>
@@ -14484,10 +14183,6 @@
           </a:solidFill>
           <a:ln/>
         </p:spPr>
-        <p:txBody>
-          <a:bodyPr/>
-          <a:p/>
-        </p:txBody>
       </p:sp>
       <p:sp>
         <p:nvSpPr>
@@ -14640,10 +14335,6 @@
           </a:solidFill>
           <a:ln/>
         </p:spPr>
-        <p:txBody>
-          <a:bodyPr/>
-          <a:p/>
-        </p:txBody>
       </p:sp>
       <p:sp>
         <p:nvSpPr>
@@ -14796,10 +14487,6 @@
           </a:solidFill>
           <a:ln/>
         </p:spPr>
-        <p:txBody>
-          <a:bodyPr/>
-          <a:p/>
-        </p:txBody>
       </p:sp>
       <p:sp>
         <p:nvSpPr>
@@ -14952,10 +14639,6 @@
           </a:solidFill>
           <a:ln/>
         </p:spPr>
-        <p:txBody>
-          <a:bodyPr/>
-          <a:p/>
-        </p:txBody>
       </p:sp>
       <p:sp>
         <p:nvSpPr>
@@ -15108,10 +14791,6 @@
           </a:solidFill>
           <a:ln/>
         </p:spPr>
-        <p:txBody>
-          <a:bodyPr/>
-          <a:p/>
-        </p:txBody>
       </p:sp>
       <p:sp>
         <p:nvSpPr>
@@ -15764,10 +15443,6 @@
           </a:solidFill>
           <a:ln/>
         </p:spPr>
-        <p:txBody>
-          <a:bodyPr/>
-          <a:p/>
-        </p:txBody>
       </p:sp>
       <p:sp>
         <p:nvSpPr>
@@ -15912,10 +15587,6 @@
           </a:solidFill>
           <a:ln/>
         </p:spPr>
-        <p:txBody>
-          <a:bodyPr/>
-          <a:p/>
-        </p:txBody>
       </p:sp>
       <p:sp>
         <p:nvSpPr>
@@ -16060,10 +15731,6 @@
           </a:solidFill>
           <a:ln/>
         </p:spPr>
-        <p:txBody>
-          <a:bodyPr/>
-          <a:p/>
-        </p:txBody>
       </p:sp>
       <p:sp>
         <p:nvSpPr>
@@ -16208,10 +15875,6 @@
           </a:solidFill>
           <a:ln/>
         </p:spPr>
-        <p:txBody>
-          <a:bodyPr/>
-          <a:p/>
-        </p:txBody>
       </p:sp>
       <p:sp>
         <p:nvSpPr>
@@ -16356,10 +16019,6 @@
           </a:solidFill>
           <a:ln/>
         </p:spPr>
-        <p:txBody>
-          <a:bodyPr/>
-          <a:p/>
-        </p:txBody>
       </p:sp>
       <p:sp>
         <p:nvSpPr>
@@ -16629,10 +16288,6 @@
             </a:outerShdw>
           </a:effectLst>
         </p:spPr>
-        <p:txBody>
-          <a:bodyPr/>
-          <a:p/>
-        </p:txBody>
       </p:sp>
       <p:sp>
         <p:nvSpPr>
@@ -16653,10 +16308,6 @@
           </a:solidFill>
           <a:ln/>
         </p:spPr>
-        <p:txBody>
-          <a:bodyPr/>
-          <a:p/>
-        </p:txBody>
       </p:sp>
       <p:sp>
         <p:nvSpPr>
@@ -16840,10 +16491,6 @@
             <a:prstDash val="solid"/>
           </a:ln>
         </p:spPr>
-        <p:txBody>
-          <a:bodyPr/>
-          <a:p/>
-        </p:txBody>
       </p:sp>
       <p:sp>
         <p:nvSpPr>
@@ -17403,10 +17050,6 @@
             <a:prstDash val="solid"/>
           </a:ln>
         </p:spPr>
-        <p:txBody>
-          <a:bodyPr/>
-          <a:p/>
-        </p:txBody>
       </p:sp>
       <p:sp>
         <p:nvSpPr>
@@ -17484,10 +17127,6 @@
             <a:prstDash val="solid"/>
           </a:ln>
         </p:spPr>
-        <p:txBody>
-          <a:bodyPr/>
-          <a:p/>
-        </p:txBody>
       </p:sp>
       <p:sp>
         <p:nvSpPr>
@@ -17676,10 +17315,6 @@
           </a:solidFill>
           <a:ln/>
         </p:spPr>
-        <p:txBody>
-          <a:bodyPr/>
-          <a:p/>
-        </p:txBody>
       </p:sp>
       <p:sp>
         <p:nvSpPr>
@@ -17700,10 +17335,6 @@
           </a:solidFill>
           <a:ln/>
         </p:spPr>
-        <p:txBody>
-          <a:bodyPr/>
-          <a:p/>
-        </p:txBody>
       </p:sp>
       <p:sp>
         <p:nvSpPr>
@@ -17724,10 +17355,6 @@
           </a:solidFill>
           <a:ln/>
         </p:spPr>
-        <p:txBody>
-          <a:bodyPr/>
-          <a:p/>
-        </p:txBody>
       </p:sp>
       <p:sp>
         <p:nvSpPr>
@@ -17748,10 +17375,6 @@
           </a:solidFill>
           <a:ln/>
         </p:spPr>
-        <p:txBody>
-          <a:bodyPr/>
-          <a:p/>
-        </p:txBody>
       </p:sp>
       <p:sp>
         <p:nvSpPr>
@@ -17772,10 +17395,6 @@
           </a:solidFill>
           <a:ln/>
         </p:spPr>
-        <p:txBody>
-          <a:bodyPr/>
-          <a:p/>
-        </p:txBody>
       </p:sp>
       <p:sp>
         <p:nvSpPr>
@@ -17988,10 +17607,6 @@
           </a:solidFill>
           <a:ln/>
         </p:spPr>
-        <p:txBody>
-          <a:bodyPr/>
-          <a:p/>
-        </p:txBody>
       </p:sp>
       <p:sp>
         <p:nvSpPr>
@@ -18102,10 +17717,6 @@
           </a:solidFill>
           <a:ln/>
         </p:spPr>
-        <p:txBody>
-          <a:bodyPr/>
-          <a:p/>
-        </p:txBody>
       </p:sp>
       <p:sp>
         <p:nvSpPr>
@@ -18126,10 +17737,6 @@
           </a:solidFill>
           <a:ln/>
         </p:spPr>
-        <p:txBody>
-          <a:bodyPr/>
-          <a:p/>
-        </p:txBody>
       </p:sp>
       <p:sp>
         <p:nvSpPr>
@@ -18150,10 +17757,6 @@
           </a:solidFill>
           <a:ln/>
         </p:spPr>
-        <p:txBody>
-          <a:bodyPr/>
-          <a:p/>
-        </p:txBody>
       </p:sp>
       <p:sp>
         <p:nvSpPr>
@@ -18174,10 +17777,6 @@
           </a:solidFill>
           <a:ln/>
         </p:spPr>
-        <p:txBody>
-          <a:bodyPr/>
-          <a:p/>
-        </p:txBody>
       </p:sp>
       <p:sp>
         <p:nvSpPr>
@@ -18198,10 +17797,6 @@
           </a:solidFill>
           <a:ln/>
         </p:spPr>
-        <p:txBody>
-          <a:bodyPr/>
-          <a:p/>
-        </p:txBody>
       </p:sp>
       <p:sp>
         <p:nvSpPr>
@@ -18414,10 +18009,6 @@
           </a:solidFill>
           <a:ln/>
         </p:spPr>
-        <p:txBody>
-          <a:bodyPr/>
-          <a:p/>
-        </p:txBody>
       </p:sp>
       <p:sp>
         <p:nvSpPr>
@@ -18528,10 +18119,6 @@
           </a:solidFill>
           <a:ln/>
         </p:spPr>
-        <p:txBody>
-          <a:bodyPr/>
-          <a:p/>
-        </p:txBody>
       </p:sp>
       <p:sp>
         <p:nvSpPr>
@@ -18552,10 +18139,6 @@
           </a:solidFill>
           <a:ln/>
         </p:spPr>
-        <p:txBody>
-          <a:bodyPr/>
-          <a:p/>
-        </p:txBody>
       </p:sp>
       <p:sp>
         <p:nvSpPr>
@@ -18576,10 +18159,6 @@
           </a:solidFill>
           <a:ln/>
         </p:spPr>
-        <p:txBody>
-          <a:bodyPr/>
-          <a:p/>
-        </p:txBody>
       </p:sp>
       <p:sp>
         <p:nvSpPr>
@@ -18600,10 +18179,6 @@
           </a:solidFill>
           <a:ln/>
         </p:spPr>
-        <p:txBody>
-          <a:bodyPr/>
-          <a:p/>
-        </p:txBody>
       </p:sp>
       <p:sp>
         <p:nvSpPr>
@@ -18624,10 +18199,6 @@
           </a:solidFill>
           <a:ln/>
         </p:spPr>
-        <p:txBody>
-          <a:bodyPr/>
-          <a:p/>
-        </p:txBody>
       </p:sp>
       <p:sp>
         <p:nvSpPr>
@@ -18840,10 +18411,6 @@
           </a:solidFill>
           <a:ln/>
         </p:spPr>
-        <p:txBody>
-          <a:bodyPr/>
-          <a:p/>
-        </p:txBody>
       </p:sp>
       <p:sp>
         <p:nvSpPr>
@@ -19108,10 +18675,6 @@
           </a:solidFill>
           <a:ln/>
         </p:spPr>
-        <p:txBody>
-          <a:bodyPr/>
-          <a:p/>
-        </p:txBody>
       </p:sp>
       <p:sp>
         <p:nvSpPr>
@@ -19132,10 +18695,6 @@
           </a:solidFill>
           <a:ln/>
         </p:spPr>
-        <p:txBody>
-          <a:bodyPr/>
-          <a:p/>
-        </p:txBody>
       </p:sp>
       <p:sp>
         <p:nvSpPr>
@@ -19156,10 +18715,6 @@
           </a:solidFill>
           <a:ln/>
         </p:spPr>
-        <p:txBody>
-          <a:bodyPr/>
-          <a:p/>
-        </p:txBody>
       </p:sp>
       <p:sp>
         <p:nvSpPr>
@@ -19180,10 +18735,6 @@
           </a:solidFill>
           <a:ln/>
         </p:spPr>
-        <p:txBody>
-          <a:bodyPr/>
-          <a:p/>
-        </p:txBody>
       </p:sp>
       <p:sp>
         <p:nvSpPr>
@@ -19204,10 +18755,6 @@
           </a:solidFill>
           <a:ln/>
         </p:spPr>
-        <p:txBody>
-          <a:bodyPr/>
-          <a:p/>
-        </p:txBody>
       </p:sp>
       <p:sp>
         <p:nvSpPr>
@@ -19362,10 +18909,6 @@
           </a:solidFill>
           <a:ln/>
         </p:spPr>
-        <p:txBody>
-          <a:bodyPr/>
-          <a:p/>
-        </p:txBody>
       </p:sp>
       <p:sp>
         <p:nvSpPr>
@@ -19386,10 +18929,6 @@
           </a:solidFill>
           <a:ln/>
         </p:spPr>
-        <p:txBody>
-          <a:bodyPr/>
-          <a:p/>
-        </p:txBody>
       </p:sp>
       <p:sp>
         <p:nvSpPr>
@@ -19410,10 +18949,6 @@
           </a:solidFill>
           <a:ln/>
         </p:spPr>
-        <p:txBody>
-          <a:bodyPr/>
-          <a:p/>
-        </p:txBody>
       </p:sp>
       <p:sp>
         <p:nvSpPr>
@@ -19434,10 +18969,6 @@
           </a:solidFill>
           <a:ln/>
         </p:spPr>
-        <p:txBody>
-          <a:bodyPr/>
-          <a:p/>
-        </p:txBody>
       </p:sp>
       <p:sp>
         <p:nvSpPr>
@@ -19458,10 +18989,6 @@
           </a:solidFill>
           <a:ln/>
         </p:spPr>
-        <p:txBody>
-          <a:bodyPr/>
-          <a:p/>
-        </p:txBody>
       </p:sp>
       <p:sp>
         <p:nvSpPr>
@@ -19616,10 +19143,6 @@
           </a:solidFill>
           <a:ln/>
         </p:spPr>
-        <p:txBody>
-          <a:bodyPr/>
-          <a:p/>
-        </p:txBody>
       </p:sp>
       <p:sp>
         <p:nvSpPr>
@@ -19640,10 +19163,6 @@
           </a:solidFill>
           <a:ln/>
         </p:spPr>
-        <p:txBody>
-          <a:bodyPr/>
-          <a:p/>
-        </p:txBody>
       </p:sp>
       <p:sp>
         <p:nvSpPr>
@@ -19664,10 +19183,6 @@
           </a:solidFill>
           <a:ln/>
         </p:spPr>
-        <p:txBody>
-          <a:bodyPr/>
-          <a:p/>
-        </p:txBody>
       </p:sp>
       <p:sp>
         <p:nvSpPr>
@@ -19688,10 +19203,6 @@
           </a:solidFill>
           <a:ln/>
         </p:spPr>
-        <p:txBody>
-          <a:bodyPr/>
-          <a:p/>
-        </p:txBody>
       </p:sp>
       <p:sp>
         <p:nvSpPr>
@@ -19712,10 +19223,6 @@
           </a:solidFill>
           <a:ln/>
         </p:spPr>
-        <p:txBody>
-          <a:bodyPr/>
-          <a:p/>
-        </p:txBody>
       </p:sp>
       <p:sp>
         <p:nvSpPr>
@@ -19870,10 +19377,6 @@
           </a:solidFill>
           <a:ln/>
         </p:spPr>
-        <p:txBody>
-          <a:bodyPr/>
-          <a:p/>
-        </p:txBody>
       </p:sp>
       <p:sp>
         <p:nvSpPr>
@@ -19894,10 +19397,6 @@
           </a:solidFill>
           <a:ln/>
         </p:spPr>
-        <p:txBody>
-          <a:bodyPr/>
-          <a:p/>
-        </p:txBody>
       </p:sp>
       <p:sp>
         <p:nvSpPr>
@@ -19918,10 +19417,6 @@
           </a:solidFill>
           <a:ln/>
         </p:spPr>
-        <p:txBody>
-          <a:bodyPr/>
-          <a:p/>
-        </p:txBody>
       </p:sp>
       <p:sp>
         <p:nvSpPr>
@@ -19942,10 +19437,6 @@
           </a:solidFill>
           <a:ln/>
         </p:spPr>
-        <p:txBody>
-          <a:bodyPr/>
-          <a:p/>
-        </p:txBody>
       </p:sp>
       <p:sp>
         <p:nvSpPr>
@@ -19966,10 +19457,6 @@
           </a:solidFill>
           <a:ln/>
         </p:spPr>
-        <p:txBody>
-          <a:bodyPr/>
-          <a:p/>
-        </p:txBody>
       </p:sp>
       <p:sp>
         <p:nvSpPr>
@@ -20124,10 +19611,6 @@
           </a:solidFill>
           <a:ln/>
         </p:spPr>
-        <p:txBody>
-          <a:bodyPr/>
-          <a:p/>
-        </p:txBody>
       </p:sp>
       <p:sp>
         <p:nvSpPr>
@@ -20148,10 +19631,6 @@
           </a:solidFill>
           <a:ln/>
         </p:spPr>
-        <p:txBody>
-          <a:bodyPr/>
-          <a:p/>
-        </p:txBody>
       </p:sp>
       <p:sp>
         <p:nvSpPr>
@@ -20172,10 +19651,6 @@
           </a:solidFill>
           <a:ln/>
         </p:spPr>
-        <p:txBody>
-          <a:bodyPr/>
-          <a:p/>
-        </p:txBody>
       </p:sp>
       <p:sp>
         <p:nvSpPr>
@@ -20196,10 +19671,6 @@
           </a:solidFill>
           <a:ln/>
         </p:spPr>
-        <p:txBody>
-          <a:bodyPr/>
-          <a:p/>
-        </p:txBody>
       </p:sp>
       <p:sp>
         <p:nvSpPr>
@@ -20220,10 +19691,6 @@
           </a:solidFill>
           <a:ln/>
         </p:spPr>
-        <p:txBody>
-          <a:bodyPr/>
-          <a:p/>
-        </p:txBody>
       </p:sp>
       <p:sp>
         <p:nvSpPr>
@@ -20643,10 +20110,6 @@
             <a:prstDash val="solid"/>
           </a:ln>
         </p:spPr>
-        <p:txBody>
-          <a:bodyPr/>
-          <a:p/>
-        </p:txBody>
       </p:sp>
       <p:sp>
         <p:nvSpPr>
@@ -20724,10 +20187,6 @@
             <a:prstDash val="solid"/>
           </a:ln>
         </p:spPr>
-        <p:txBody>
-          <a:bodyPr/>
-          <a:p/>
-        </p:txBody>
       </p:sp>
       <p:sp>
         <p:nvSpPr>
@@ -20805,10 +20264,6 @@
             <a:prstDash val="solid"/>
           </a:ln>
         </p:spPr>
-        <p:txBody>
-          <a:bodyPr/>
-          <a:p/>
-        </p:txBody>
       </p:sp>
       <p:sp>
         <p:nvSpPr>
@@ -21002,10 +20457,6 @@
             <a:prstDash val="solid"/>
           </a:ln>
         </p:spPr>
-        <p:txBody>
-          <a:bodyPr/>
-          <a:p/>
-        </p:txBody>
       </p:sp>
       <p:sp>
         <p:nvSpPr>
@@ -21209,10 +20660,6 @@
             <a:prstDash val="solid"/>
           </a:ln>
         </p:spPr>
-        <p:txBody>
-          <a:bodyPr/>
-          <a:p/>
-        </p:txBody>
       </p:sp>
       <p:sp>
         <p:nvSpPr>
@@ -21416,10 +20863,6 @@
             <a:prstDash val="solid"/>
           </a:ln>
         </p:spPr>
-        <p:txBody>
-          <a:bodyPr/>
-          <a:p/>
-        </p:txBody>
       </p:sp>
       <p:sp>
         <p:nvSpPr>
@@ -21824,10 +21267,6 @@
           </a:solidFill>
           <a:ln/>
         </p:spPr>
-        <p:txBody>
-          <a:bodyPr/>
-          <a:p/>
-        </p:txBody>
       </p:sp>
       <p:sp>
         <p:nvSpPr>
@@ -22024,10 +21463,6 @@
           </a:solidFill>
           <a:ln/>
         </p:spPr>
-        <p:txBody>
-          <a:bodyPr/>
-          <a:p/>
-        </p:txBody>
       </p:sp>
       <p:sp>
         <p:nvSpPr>
@@ -22520,10 +21955,6 @@
           </a:solidFill>
           <a:ln/>
         </p:spPr>
-        <p:txBody>
-          <a:bodyPr/>
-          <a:p/>
-        </p:txBody>
       </p:sp>
       <p:sp>
         <p:nvSpPr>
@@ -22676,10 +22107,6 @@
           </a:solidFill>
           <a:ln/>
         </p:spPr>
-        <p:txBody>
-          <a:bodyPr/>
-          <a:p/>
-        </p:txBody>
       </p:sp>
       <p:sp>
         <p:nvSpPr>
@@ -22832,10 +22259,6 @@
           </a:solidFill>
           <a:ln/>
         </p:spPr>
-        <p:txBody>
-          <a:bodyPr/>
-          <a:p/>
-        </p:txBody>
       </p:sp>
       <p:sp>
         <p:nvSpPr>
@@ -22988,10 +22411,6 @@
           </a:solidFill>
           <a:ln/>
         </p:spPr>
-        <p:txBody>
-          <a:bodyPr/>
-          <a:p/>
-        </p:txBody>
       </p:sp>
       <p:sp>
         <p:nvSpPr>
@@ -23271,10 +22690,6 @@
             <a:prstDash val="solid"/>
           </a:ln>
         </p:spPr>
-        <p:txBody>
-          <a:bodyPr/>
-          <a:p/>
-        </p:txBody>
       </p:sp>
       <p:sp>
         <p:nvSpPr>
@@ -23295,10 +22710,6 @@
           </a:solidFill>
           <a:ln/>
         </p:spPr>
-        <p:txBody>
-          <a:bodyPr/>
-          <a:p/>
-        </p:txBody>
       </p:sp>
       <p:sp>
         <p:nvSpPr>
@@ -23319,10 +22730,6 @@
           </a:solidFill>
           <a:ln/>
         </p:spPr>
-        <p:txBody>
-          <a:bodyPr/>
-          <a:p/>
-        </p:txBody>
       </p:sp>
       <p:sp>
         <p:nvSpPr>
@@ -23345,10 +22752,6 @@
           </a:solidFill>
           <a:ln/>
         </p:spPr>
-        <p:txBody>
-          <a:bodyPr/>
-          <a:p/>
-        </p:txBody>
       </p:sp>
       <p:sp>
         <p:nvSpPr>
@@ -23457,10 +22860,6 @@
           </a:solidFill>
           <a:ln/>
         </p:spPr>
-        <p:txBody>
-          <a:bodyPr/>
-          <a:p/>
-        </p:txBody>
       </p:sp>
       <p:sp>
         <p:nvSpPr>
@@ -23483,10 +22882,6 @@
           </a:solidFill>
           <a:ln/>
         </p:spPr>
-        <p:txBody>
-          <a:bodyPr/>
-          <a:p/>
-        </p:txBody>
       </p:sp>
       <p:sp>
         <p:nvSpPr>
@@ -23636,10 +23031,6 @@
             <a:prstDash val="solid"/>
           </a:ln>
         </p:spPr>
-        <p:txBody>
-          <a:bodyPr/>
-          <a:p/>
-        </p:txBody>
       </p:sp>
       <p:sp>
         <p:nvSpPr>
@@ -23660,10 +23051,6 @@
           </a:solidFill>
           <a:ln/>
         </p:spPr>
-        <p:txBody>
-          <a:bodyPr/>
-          <a:p/>
-        </p:txBody>
       </p:sp>
       <p:sp>
         <p:nvSpPr>
@@ -23684,10 +23071,6 @@
           </a:solidFill>
           <a:ln/>
         </p:spPr>
-        <p:txBody>
-          <a:bodyPr/>
-          <a:p/>
-        </p:txBody>
       </p:sp>
       <p:sp>
         <p:nvSpPr>
@@ -23710,10 +23093,6 @@
           </a:solidFill>
           <a:ln/>
         </p:spPr>
-        <p:txBody>
-          <a:bodyPr/>
-          <a:p/>
-        </p:txBody>
       </p:sp>
       <p:sp>
         <p:nvSpPr>
@@ -23822,10 +23201,6 @@
           </a:solidFill>
           <a:ln/>
         </p:spPr>
-        <p:txBody>
-          <a:bodyPr/>
-          <a:p/>
-        </p:txBody>
       </p:sp>
       <p:sp>
         <p:nvSpPr>
@@ -23848,10 +23223,6 @@
           </a:solidFill>
           <a:ln/>
         </p:spPr>
-        <p:txBody>
-          <a:bodyPr/>
-          <a:p/>
-        </p:txBody>
       </p:sp>
       <p:sp>
         <p:nvSpPr>
@@ -24001,10 +23372,6 @@
             <a:prstDash val="solid"/>
           </a:ln>
         </p:spPr>
-        <p:txBody>
-          <a:bodyPr/>
-          <a:p/>
-        </p:txBody>
       </p:sp>
       <p:sp>
         <p:nvSpPr>
@@ -24025,10 +23392,6 @@
           </a:solidFill>
           <a:ln/>
         </p:spPr>
-        <p:txBody>
-          <a:bodyPr/>
-          <a:p/>
-        </p:txBody>
       </p:sp>
       <p:sp>
         <p:nvSpPr>
@@ -24049,10 +23412,6 @@
           </a:solidFill>
           <a:ln/>
         </p:spPr>
-        <p:txBody>
-          <a:bodyPr/>
-          <a:p/>
-        </p:txBody>
       </p:sp>
       <p:sp>
         <p:nvSpPr>
@@ -24075,10 +23434,6 @@
           </a:solidFill>
           <a:ln/>
         </p:spPr>
-        <p:txBody>
-          <a:bodyPr/>
-          <a:p/>
-        </p:txBody>
       </p:sp>
       <p:sp>
         <p:nvSpPr>
@@ -24187,10 +23542,6 @@
           </a:solidFill>
           <a:ln/>
         </p:spPr>
-        <p:txBody>
-          <a:bodyPr/>
-          <a:p/>
-        </p:txBody>
       </p:sp>
       <p:sp>
         <p:nvSpPr>
@@ -24213,10 +23564,6 @@
           </a:solidFill>
           <a:ln/>
         </p:spPr>
-        <p:txBody>
-          <a:bodyPr/>
-          <a:p/>
-        </p:txBody>
       </p:sp>
       <p:sp>
         <p:nvSpPr>
@@ -24366,10 +23713,6 @@
             <a:prstDash val="solid"/>
           </a:ln>
         </p:spPr>
-        <p:txBody>
-          <a:bodyPr/>
-          <a:p/>
-        </p:txBody>
       </p:sp>
       <p:sp>
         <p:nvSpPr>
@@ -24390,10 +23733,6 @@
           </a:solidFill>
           <a:ln/>
         </p:spPr>
-        <p:txBody>
-          <a:bodyPr/>
-          <a:p/>
-        </p:txBody>
       </p:sp>
       <p:sp>
         <p:nvSpPr>
@@ -24414,10 +23753,6 @@
           </a:solidFill>
           <a:ln/>
         </p:spPr>
-        <p:txBody>
-          <a:bodyPr/>
-          <a:p/>
-        </p:txBody>
       </p:sp>
       <p:sp>
         <p:nvSpPr>
@@ -24440,10 +23775,6 @@
           </a:solidFill>
           <a:ln/>
         </p:spPr>
-        <p:txBody>
-          <a:bodyPr/>
-          <a:p/>
-        </p:txBody>
       </p:sp>
       <p:sp>
         <p:nvSpPr>
@@ -24552,10 +23883,6 @@
           </a:solidFill>
           <a:ln/>
         </p:spPr>
-        <p:txBody>
-          <a:bodyPr/>
-          <a:p/>
-        </p:txBody>
       </p:sp>
       <p:sp>
         <p:nvSpPr>
@@ -24578,10 +23905,6 @@
           </a:solidFill>
           <a:ln/>
         </p:spPr>
-        <p:txBody>
-          <a:bodyPr/>
-          <a:p/>
-        </p:txBody>
       </p:sp>
       <p:sp>
         <p:nvSpPr>
@@ -25193,10 +24516,6 @@
             <a:prstDash val="solid"/>
           </a:ln>
         </p:spPr>
-        <p:txBody>
-          <a:bodyPr/>
-          <a:p/>
-        </p:txBody>
       </p:sp>
       <p:sp>
         <p:nvSpPr>
@@ -25274,10 +24593,6 @@
             <a:prstDash val="solid"/>
           </a:ln>
         </p:spPr>
-        <p:txBody>
-          <a:bodyPr/>
-          <a:p/>
-        </p:txBody>
       </p:sp>
       <p:sp>
         <p:nvSpPr>
@@ -25355,10 +24670,6 @@
             <a:prstDash val="solid"/>
           </a:ln>
         </p:spPr>
-        <p:txBody>
-          <a:bodyPr/>
-          <a:p/>
-        </p:txBody>
       </p:sp>
       <p:sp>
         <p:nvSpPr>
@@ -25552,10 +24863,6 @@
             <a:prstDash val="solid"/>
           </a:ln>
         </p:spPr>
-        <p:txBody>
-          <a:bodyPr/>
-          <a:p/>
-        </p:txBody>
       </p:sp>
       <p:sp>
         <p:nvSpPr>
@@ -25715,10 +25022,6 @@
             <a:prstDash val="solid"/>
           </a:ln>
         </p:spPr>
-        <p:txBody>
-          <a:bodyPr/>
-          <a:p/>
-        </p:txBody>
       </p:sp>
       <p:sp>
         <p:nvSpPr>
@@ -25878,10 +25181,6 @@
             <a:prstDash val="solid"/>
           </a:ln>
         </p:spPr>
-        <p:txBody>
-          <a:bodyPr/>
-          <a:p/>
-        </p:txBody>
       </p:sp>
       <p:sp>
         <p:nvSpPr>
@@ -26041,10 +25340,6 @@
             <a:prstDash val="solid"/>
           </a:ln>
         </p:spPr>
-        <p:txBody>
-          <a:bodyPr/>
-          <a:p/>
-        </p:txBody>
       </p:sp>
       <p:sp>
         <p:nvSpPr>
@@ -26204,10 +25499,6 @@
             <a:prstDash val="solid"/>
           </a:ln>
         </p:spPr>
-        <p:txBody>
-          <a:bodyPr/>
-          <a:p/>
-        </p:txBody>
       </p:sp>
       <p:sp>
         <p:nvSpPr>
@@ -26367,10 +25658,6 @@
             <a:prstDash val="solid"/>
           </a:ln>
         </p:spPr>
-        <p:txBody>
-          <a:bodyPr/>
-          <a:p/>
-        </p:txBody>
       </p:sp>
       <p:sp>
         <p:nvSpPr>
@@ -26650,10 +25937,6 @@
             <a:prstDash val="solid"/>
           </a:ln>
         </p:spPr>
-        <p:txBody>
-          <a:bodyPr/>
-          <a:p/>
-        </p:txBody>
       </p:sp>
       <p:sp>
         <p:nvSpPr>
@@ -26674,10 +25957,6 @@
           </a:solidFill>
           <a:ln/>
         </p:spPr>
-        <p:txBody>
-          <a:bodyPr/>
-          <a:p/>
-        </p:txBody>
       </p:sp>
       <p:sp>
         <p:nvSpPr>
@@ -26883,10 +26162,6 @@
             <a:prstDash val="solid"/>
           </a:ln>
         </p:spPr>
-        <p:txBody>
-          <a:bodyPr/>
-          <a:p/>
-        </p:txBody>
       </p:sp>
       <p:sp>
         <p:nvSpPr>
@@ -26907,10 +26182,6 @@
           </a:solidFill>
           <a:ln/>
         </p:spPr>
-        <p:txBody>
-          <a:bodyPr/>
-          <a:p/>
-        </p:txBody>
       </p:sp>
       <p:sp>
         <p:nvSpPr>
@@ -27116,10 +26387,6 @@
             <a:prstDash val="solid"/>
           </a:ln>
         </p:spPr>
-        <p:txBody>
-          <a:bodyPr/>
-          <a:p/>
-        </p:txBody>
       </p:sp>
       <p:sp>
         <p:nvSpPr>
@@ -27140,10 +26407,6 @@
           </a:solidFill>
           <a:ln/>
         </p:spPr>
-        <p:txBody>
-          <a:bodyPr/>
-          <a:p/>
-        </p:txBody>
       </p:sp>
       <p:sp>
         <p:nvSpPr>
@@ -27469,10 +26732,6 @@
             <a:prstDash val="solid"/>
           </a:ln>
         </p:spPr>
-        <p:txBody>
-          <a:bodyPr/>
-          <a:p/>
-        </p:txBody>
       </p:sp>
       <p:sp>
         <p:nvSpPr>
@@ -27497,10 +26756,6 @@
             <a:prstDash val="solid"/>
           </a:ln>
         </p:spPr>
-        <p:txBody>
-          <a:bodyPr/>
-          <a:p/>
-        </p:txBody>
       </p:sp>
       <p:sp>
         <p:nvSpPr>
@@ -27606,10 +26861,6 @@
             <a:prstDash val="solid"/>
           </a:ln>
         </p:spPr>
-        <p:txBody>
-          <a:bodyPr/>
-          <a:p/>
-        </p:txBody>
       </p:sp>
       <p:sp>
         <p:nvSpPr>
@@ -27634,10 +26885,6 @@
             <a:prstDash val="solid"/>
           </a:ln>
         </p:spPr>
-        <p:txBody>
-          <a:bodyPr/>
-          <a:p/>
-        </p:txBody>
       </p:sp>
       <p:sp>
         <p:nvSpPr>
@@ -27743,10 +26990,6 @@
             <a:prstDash val="solid"/>
           </a:ln>
         </p:spPr>
-        <p:txBody>
-          <a:bodyPr/>
-          <a:p/>
-        </p:txBody>
       </p:sp>
       <p:sp>
         <p:nvSpPr>
@@ -27771,10 +27014,6 @@
             <a:prstDash val="solid"/>
           </a:ln>
         </p:spPr>
-        <p:txBody>
-          <a:bodyPr/>
-          <a:p/>
-        </p:txBody>
       </p:sp>
       <p:sp>
         <p:nvSpPr>
@@ -27880,10 +27119,6 @@
             <a:prstDash val="solid"/>
           </a:ln>
         </p:spPr>
-        <p:txBody>
-          <a:bodyPr/>
-          <a:p/>
-        </p:txBody>
       </p:sp>
       <p:sp>
         <p:nvSpPr>
@@ -27908,10 +27143,6 @@
             <a:prstDash val="solid"/>
           </a:ln>
         </p:spPr>
-        <p:txBody>
-          <a:bodyPr/>
-          <a:p/>
-        </p:txBody>
       </p:sp>
       <p:sp>
         <p:nvSpPr>
@@ -28017,10 +27248,6 @@
             <a:prstDash val="solid"/>
           </a:ln>
         </p:spPr>
-        <p:txBody>
-          <a:bodyPr/>
-          <a:p/>
-        </p:txBody>
       </p:sp>
       <p:sp>
         <p:nvSpPr>
@@ -28045,10 +27272,6 @@
             <a:prstDash val="solid"/>
           </a:ln>
         </p:spPr>
-        <p:txBody>
-          <a:bodyPr/>
-          <a:p/>
-        </p:txBody>
       </p:sp>
       <p:sp>
         <p:nvSpPr>
@@ -28154,10 +27377,6 @@
             <a:prstDash val="solid"/>
           </a:ln>
         </p:spPr>
-        <p:txBody>
-          <a:bodyPr/>
-          <a:p/>
-        </p:txBody>
       </p:sp>
       <p:sp>
         <p:nvSpPr>
@@ -28182,10 +27401,6 @@
             <a:prstDash val="solid"/>
           </a:ln>
         </p:spPr>
-        <p:txBody>
-          <a:bodyPr/>
-          <a:p/>
-        </p:txBody>
       </p:sp>
       <p:sp>
         <p:nvSpPr>
@@ -28404,10 +27619,6 @@
           </a:solidFill>
           <a:ln/>
         </p:spPr>
-        <p:txBody>
-          <a:bodyPr/>
-          <a:p/>
-        </p:txBody>
       </p:sp>
       <p:sp>
         <p:nvSpPr>
@@ -28560,10 +27771,6 @@
           </a:solidFill>
           <a:ln/>
         </p:spPr>
-        <p:txBody>
-          <a:bodyPr/>
-          <a:p/>
-        </p:txBody>
       </p:sp>
       <p:sp>
         <p:nvSpPr>
@@ -28716,10 +27923,6 @@
           </a:solidFill>
           <a:ln/>
         </p:spPr>
-        <p:txBody>
-          <a:bodyPr/>
-          <a:p/>
-        </p:txBody>
       </p:sp>
       <p:sp>
         <p:nvSpPr>
@@ -28872,10 +28075,6 @@
           </a:solidFill>
           <a:ln/>
         </p:spPr>
-        <p:txBody>
-          <a:bodyPr/>
-          <a:p/>
-        </p:txBody>
       </p:sp>
       <p:sp>
         <p:nvSpPr>
@@ -29028,10 +28227,6 @@
           </a:solidFill>
           <a:ln/>
         </p:spPr>
-        <p:txBody>
-          <a:bodyPr/>
-          <a:p/>
-        </p:txBody>
       </p:sp>
       <p:sp>
         <p:nvSpPr>
@@ -29184,10 +28379,6 @@
           </a:solidFill>
           <a:ln/>
         </p:spPr>
-        <p:txBody>
-          <a:bodyPr/>
-          <a:p/>
-        </p:txBody>
       </p:sp>
       <p:sp>
         <p:nvSpPr>
@@ -29628,10 +28819,6 @@
           </a:solidFill>
           <a:ln/>
         </p:spPr>
-        <p:txBody>
-          <a:bodyPr/>
-          <a:p/>
-        </p:txBody>
       </p:sp>
       <p:sp>
         <p:nvSpPr>
@@ -29759,7 +28946,7 @@
                 <a:ea typeface="Arial" pitchFamily="34" charset="-122"/>
                 <a:cs typeface="Arial" pitchFamily="34" charset="-120"/>
               </a:rPr>
-              <a:t>52 Victorian drownings in 2024–25</a:t>
+              <a:t>54 Victorian drownings in 2023–24</a:t>
             </a:r>
             <a:endParaRPr lang="en-US" sz="1650" dirty="0"/>
           </a:p>
@@ -29779,7 +28966,7 @@
                 <a:ea typeface="Arial" pitchFamily="34" charset="-122"/>
                 <a:cs typeface="Arial" pitchFamily="34" charset="-120"/>
               </a:rPr>
-              <a:t>About 1 in 8 victims aged 15–24</a:t>
+              <a:t>1 in 5 victims aged 15–24</a:t>
             </a:r>
             <a:endParaRPr lang="en-US" sz="1650" dirty="0"/>
           </a:p>
@@ -29799,7 +28986,7 @@
                 <a:ea typeface="Arial" pitchFamily="34" charset="-122"/>
                 <a:cs typeface="Arial" pitchFamily="34" charset="-120"/>
               </a:rPr>
-              <a:t>Zero deaths in public pools</a:t>
+              <a:t>Zero deaths at patrolled sites</a:t>
             </a:r>
             <a:endParaRPr lang="en-US" sz="1650" dirty="0"/>
           </a:p>
@@ -29844,10 +29031,6 @@
           </a:solidFill>
           <a:ln/>
         </p:spPr>
-        <p:txBody>
-          <a:bodyPr/>
-          <a:p/>
-        </p:txBody>
       </p:sp>
       <p:sp>
         <p:nvSpPr>
@@ -30060,10 +29243,6 @@
           </a:solidFill>
           <a:ln/>
         </p:spPr>
-        <p:txBody>
-          <a:bodyPr/>
-          <a:p/>
-        </p:txBody>
       </p:sp>
       <p:sp>
         <p:nvSpPr>
@@ -30276,10 +29455,6 @@
           </a:solidFill>
           <a:ln/>
         </p:spPr>
-        <p:txBody>
-          <a:bodyPr/>
-          <a:p/>
-        </p:txBody>
       </p:sp>
       <p:sp>
         <p:nvSpPr>
@@ -30492,10 +29667,6 @@
           </a:solidFill>
           <a:ln/>
         </p:spPr>
-        <p:txBody>
-          <a:bodyPr/>
-          <a:p/>
-        </p:txBody>
       </p:sp>
       <p:sp>
         <p:nvSpPr>
@@ -30686,212 +29857,6 @@
               <a:t>Credible sources only</a:t>
             </a:r>
             <a:endParaRPr lang="en-US" sz="1650" dirty="0"/>
-          </a:p>
-        </p:txBody>
-      </p:sp>
-    </p:spTree>
-  </p:cSld>
-  <p:clrMapOvr>
-    <a:masterClrMapping/>
-  </p:clrMapOvr>
-</p:sld>
-</file>
-
-<file path=ppt/slides/slide41.xml><?xml version="1.0" encoding="utf-8"?>
-<p:sld xmlns:a="http://schemas.openxmlformats.org/drawingml/2006/main" xmlns:p="http://schemas.openxmlformats.org/presentationml/2006/main" xmlns:r="http://schemas.openxmlformats.org/officeDocument/2006/relationships">
-  <p:cSld>
-    <p:spTree>
-      <p:nvGrpSpPr>
-        <p:cNvPr id="1" name=""/>
-        <p:cNvGrpSpPr/>
-        <p:nvPr/>
-      </p:nvGrpSpPr>
-      <p:grpSpPr/>
-      <p:sp>
-        <p:nvSpPr>
-          <p:cNvPr id="2" name="TextBox 1"/>
-          <p:cNvSpPr txBox="1"/>
-          <p:nvPr/>
-        </p:nvSpPr>
-        <p:spPr>
-          <a:xfrm>
-            <a:off x="640080" y="640080"/>
-            <a:ext cx="17007840" cy="9006840"/>
-          </a:xfrm>
-          <a:prstGeom prst="rect">
-            <a:avLst/>
-          </a:prstGeom>
-          <a:noFill/>
-        </p:spPr>
-        <p:txBody>
-          <a:bodyPr wrap="square">
-            <a:spAutoFit/>
-          </a:bodyPr>
-          <a:lstStyle/>
-          <a:p>
-            <a:pPr>
-              <a:spcAft>
-                <a:spcPts val="1400"/>
-              </a:spcAft>
-            </a:pPr>
-            <a:r>
-              <a:rPr sz="2600" b="1">
-                <a:solidFill>
-                  <a:srgbClr val="0A1E3D"/>
-                </a:solidFill>
-              </a:rPr>
-              <a:t>Licence &amp; Attribution</a:t>
-            </a:r>
-          </a:p>
-          <a:p>
-            <a:pPr>
-              <a:spcAft>
-                <a:spcPts val="1000"/>
-              </a:spcAft>
-            </a:pPr>
-            <a:r>
-              <a:rPr sz="1400" b="1">
-                <a:solidFill>
-                  <a:srgbClr val="1565C0"/>
-                </a:solidFill>
-              </a:rPr>
-              <a:t>© 2026 Emilie Harrison — Swim &amp; Water Safety Teaching Hub</a:t>
-            </a:r>
-          </a:p>
-          <a:p>
-            <a:pPr>
-              <a:spcAft>
-                <a:spcPts val="1000"/>
-              </a:spcAft>
-            </a:pPr>
-            <a:r>
-              <a:rPr sz="1200" b="0">
-                <a:solidFill>
-                  <a:srgbClr val="1A2840"/>
-                </a:solidFill>
-              </a:rPr>
-              <a:t>Licensed under Creative Commons Attribution 4.0 International (CC BY 4.0). You are free to copy, adapt, remix and redistribute this deck — including commercially — provided you credit the author and indicate any changes.</a:t>
-            </a:r>
-          </a:p>
-          <a:p>
-            <a:pPr>
-              <a:spcAft>
-                <a:spcPts val="1000"/>
-              </a:spcAft>
-            </a:pPr>
-            <a:r>
-              <a:rPr sz="1100" b="0">
-                <a:solidFill>
-                  <a:srgbClr val="5A6E8A"/>
-                </a:solidFill>
-              </a:rPr>
-              <a:t>Attribution: "Swim &amp; Water Safety Teaching Hub" by Emilie Harrison, CC BY 4.0. Source: emilie-harrison.github.io/swim-water-safety</a:t>
-            </a:r>
-          </a:p>
-          <a:p>
-            <a:pPr>
-              <a:spcAft>
-                <a:spcPts val="1000"/>
-              </a:spcAft>
-            </a:pPr>
-            <a:r>
-              <a:rPr sz="1100" b="0">
-                <a:solidFill>
-                  <a:srgbClr val="5A6E8A"/>
-                </a:solidFill>
-              </a:rPr>
-              <a:t>Third-party material is not covered by this licence. Content owned by Life Saving Victoria, Royal Life Saving Australia, Surf Life Saving Australia, VCAA, ACARA, AIATSIS and the Australian Resuscitation Council — including drowning data, clinical guidelines, curriculum content, logos and program names — remains with its owners.</a:t>
-            </a:r>
-          </a:p>
-          <a:p>
-            <a:pPr>
-              <a:spcAft>
-                <a:spcPts val="1000"/>
-              </a:spcAft>
-            </a:pPr>
-            <a:r>
-              <a:rPr sz="1000" b="0">
-                <a:solidFill>
-                  <a:srgbClr val="5A6E8A"/>
-                </a:solidFill>
-              </a:rPr>
-              <a:t>Statistics: Life Saving Victoria, Victorian Drowning Report 2024–25. Deck updated September 2026.</a:t>
-            </a:r>
-          </a:p>
-          <a:p>
-            <a:pPr>
-              <a:spcAft>
-                <a:spcPts val="300"/>
-              </a:spcAft>
-            </a:pPr>
-            <a:r>
-              <a:rPr sz="1000">
-                <a:solidFill>
-                  <a:srgbClr val="5A6E8A"/>
-                </a:solidFill>
-              </a:rPr>
-              <a:t>Data sources cited in this deck — retain these citations if you adapt it:</a:t>
-            </a:r>
-          </a:p>
-          <a:p>
-            <a:pPr>
-              <a:spcAft>
-                <a:spcPts val="300"/>
-              </a:spcAft>
-            </a:pPr>
-            <a:r>
-              <a:rPr sz="1000">
-                <a:solidFill>
-                  <a:srgbClr val="5A6E8A"/>
-                </a:solidFill>
-              </a:rPr>
-              <a:t>• Life Saving Victoria. (2025). Victorian Drowning Report 2024–25. Life Saving Victoria: Melbourne.</a:t>
-            </a:r>
-          </a:p>
-          <a:p>
-            <a:pPr>
-              <a:spcAft>
-                <a:spcPts val="300"/>
-              </a:spcAft>
-            </a:pPr>
-            <a:r>
-              <a:rPr sz="1000">
-                <a:solidFill>
-                  <a:srgbClr val="5A6E8A"/>
-                </a:solidFill>
-              </a:rPr>
-              <a:t>• Royal Life Saving Australia (2026). National Drowning Report 2026. RLSSA: Sydney.</a:t>
-            </a:r>
-          </a:p>
-          <a:p>
-            <a:pPr>
-              <a:spcAft>
-                <a:spcPts val="300"/>
-              </a:spcAft>
-            </a:pPr>
-            <a:r>
-              <a:rPr sz="1000">
-                <a:solidFill>
-                  <a:srgbClr val="5A6E8A"/>
-                </a:solidFill>
-              </a:rPr>
-              <a:t>• Surf Life Saving Australia (2026). Summer Coastal Drowning Report 2025/26. SLSA: Sydney.</a:t>
-            </a:r>
-          </a:p>
-          <a:p>
-            <a:pPr>
-              <a:spcAft>
-                <a:spcPts val="300"/>
-              </a:spcAft>
-            </a:pPr>
-            <a:r>
-              <a:rPr sz="1000">
-                <a:solidFill>
-                  <a:srgbClr val="5A6E8A"/>
-                </a:solidFill>
-              </a:rPr>
-              <a:t>These figures remain the property of the publishing organisations.</a:t>
-            </a:r>
           </a:p>
         </p:txBody>
       </p:sp>
@@ -30965,7 +29930,7 @@
                 <a:ea typeface="Courier New" pitchFamily="34" charset="-122"/>
                 <a:cs typeface="Courier New" pitchFamily="34" charset="-120"/>
               </a:rPr>
-              <a:t>VICTORIA · 2024–25 · LIFE SAVING VICTORIA REPORT</a:t>
+              <a:t>VICTORIA · 2023–24 · LIFE SAVING VICTORIA REPORT</a:t>
             </a:r>
             <a:endParaRPr lang="en-US" sz="1800" dirty="0"/>
           </a:p>
@@ -31041,10 +30006,6 @@
             <a:prstDash val="solid"/>
           </a:ln>
         </p:spPr>
-        <p:txBody>
-          <a:bodyPr/>
-          <a:p/>
-        </p:txBody>
       </p:sp>
       <p:sp>
         <p:nvSpPr>
@@ -31128,7 +30089,7 @@
                 <a:ea typeface="Arial" pitchFamily="34" charset="-122"/>
                 <a:cs typeface="Arial" pitchFamily="34" charset="-120"/>
               </a:rPr>
-              <a:t>52</a:t>
+              <a:t>54</a:t>
             </a:r>
             <a:endParaRPr lang="en-US" sz="10500" dirty="0"/>
           </a:p>
@@ -31204,10 +30165,6 @@
             <a:prstDash val="solid"/>
           </a:ln>
         </p:spPr>
-        <p:txBody>
-          <a:bodyPr/>
-          <a:p/>
-        </p:txBody>
       </p:sp>
       <p:sp>
         <p:nvSpPr>
@@ -31291,7 +30248,7 @@
                 <a:ea typeface="Arial" pitchFamily="34" charset="-122"/>
                 <a:cs typeface="Arial" pitchFamily="34" charset="-120"/>
               </a:rPr>
-              <a:t>about 1 in 8</a:t>
+              <a:t>1 in 5</a:t>
             </a:r>
             <a:endParaRPr lang="en-US" sz="10500" dirty="0"/>
           </a:p>
@@ -31367,10 +30324,6 @@
             <a:prstDash val="solid"/>
           </a:ln>
         </p:spPr>
-        <p:txBody>
-          <a:bodyPr/>
-          <a:p/>
-        </p:txBody>
       </p:sp>
       <p:sp>
         <p:nvSpPr>
@@ -31498,7 +30451,7 @@
                 <a:ea typeface="Arial" pitchFamily="34" charset="-122"/>
                 <a:cs typeface="Arial" pitchFamily="34" charset="-120"/>
               </a:rPr>
-              <a:t>Of 52 — 38 male, 14 female.</a:t>
+              <a:t>Of 54 — males drown about 4× as often as females.</a:t>
             </a:r>
             <a:endParaRPr lang="en-US" sz="1800" dirty="0"/>
           </a:p>
@@ -31530,10 +30483,6 @@
             <a:prstDash val="solid"/>
           </a:ln>
         </p:spPr>
-        <p:txBody>
-          <a:bodyPr/>
-          <a:p/>
-        </p:txBody>
       </p:sp>
       <p:sp>
         <p:nvSpPr>
@@ -31661,7 +30610,7 @@
                 <a:ea typeface="Arial" pitchFamily="34" charset="-122"/>
                 <a:cs typeface="Arial" pitchFamily="34" charset="-120"/>
               </a:rPr>
-              <a:t>Zero deaths in public swimming pools — first time since 2019–20.</a:t>
+              <a:t>Zero of the 54 deaths happened between the flags.</a:t>
             </a:r>
             <a:endParaRPr lang="en-US" sz="1800" dirty="0"/>
           </a:p>
@@ -31705,7 +30654,7 @@
                 <a:ea typeface="Courier New" pitchFamily="34" charset="-122"/>
                 <a:cs typeface="Courier New" pitchFamily="34" charset="-120"/>
               </a:rPr>
-              <a:t>Source · LSV Victorian Drowning Report 2024–25</a:t>
+              <a:t>Source · LSV Victorian Drowning Report 2023–24</a:t>
             </a:r>
             <a:endParaRPr lang="en-US" sz="1800" dirty="0"/>
           </a:p>
@@ -31930,7 +30879,7 @@
                 <a:ea typeface="Arial" pitchFamily="34" charset="-122"/>
                 <a:cs typeface="Arial" pitchFamily="34" charset="-120"/>
               </a:rPr>
-              <a:t>of Victorian drownings in 2024–25 were people aged 15 to 24. That's the age group most of us will be in within five years.</a:t>
+              <a:t>of Victorian drownings in 2023–24 were people aged 15 to 24. That's the age group most of us will be in within five years.</a:t>
             </a:r>
             <a:endParaRPr lang="en-US" sz="4200" dirty="0"/>
           </a:p>
@@ -32472,7 +31421,7 @@
                 <a:ea typeface="Courier New" pitchFamily="34" charset="-122"/>
                 <a:cs typeface="Courier New" pitchFamily="34" charset="-120"/>
               </a:rPr>
-              <a:t>Source · LSV Victorian Drowning Report 2024–25</a:t>
+              <a:t>Source · LSV Victorian Drowning Report 2023–24</a:t>
             </a:r>
             <a:endParaRPr lang="en-US" sz="1800" dirty="0"/>
           </a:p>
@@ -32661,10 +31610,6 @@
           </a:solidFill>
           <a:ln/>
         </p:spPr>
-        <p:txBody>
-          <a:bodyPr/>
-          <a:p/>
-        </p:txBody>
       </p:sp>
       <p:sp>
         <p:nvSpPr>
@@ -32817,10 +31762,6 @@
           </a:solidFill>
           <a:ln/>
         </p:spPr>
-        <p:txBody>
-          <a:bodyPr/>
-          <a:p/>
-        </p:txBody>
       </p:sp>
       <p:sp>
         <p:nvSpPr>
@@ -32973,10 +31914,6 @@
           </a:solidFill>
           <a:ln/>
         </p:spPr>
-        <p:txBody>
-          <a:bodyPr/>
-          <a:p/>
-        </p:txBody>
       </p:sp>
       <p:sp>
         <p:nvSpPr>
@@ -33129,10 +32066,6 @@
           </a:solidFill>
           <a:ln/>
         </p:spPr>
-        <p:txBody>
-          <a:bodyPr/>
-          <a:p/>
-        </p:txBody>
       </p:sp>
       <p:sp>
         <p:nvSpPr>
@@ -33426,7 +32359,7 @@
                 <a:ea typeface="Arial" pitchFamily="34" charset="-122"/>
                 <a:cs typeface="Arial" pitchFamily="34" charset="-120"/>
               </a:rPr>
-              <a:t>In 2024–25, Victoria recorded zero drowning deaths in public swimming pools — the first time since 2019–20. But 25% of deaths happened in home environments, where no lifeguard can reach.</a:t>
+              <a:t>In 2023–24, </a:t>
             </a:r>
             <a:pPr algn="l" indent="0" marL="0">
               <a:lnSpc>
@@ -33443,7 +32376,7 @@
                 <a:ea typeface="Arial" pitchFamily="34" charset="-122"/>
                 <a:cs typeface="Arial" pitchFamily="34" charset="-120"/>
               </a:rPr>
-              <a:t/>
+              <a:t>zero </a:t>
             </a:r>
             <a:pPr algn="l" indent="0" marL="0">
               <a:lnSpc>
@@ -33462,7 +32395,7 @@
                 <a:ea typeface="Arial" pitchFamily="34" charset="-122"/>
                 <a:cs typeface="Arial" pitchFamily="34" charset="-120"/>
               </a:rPr>
-              <a:t/>
+              <a:t>of the 54 Victorian drowning deaths happened at a patrolled location.</a:t>
             </a:r>
             <a:endParaRPr lang="en-US" sz="3000" dirty="0"/>
           </a:p>
@@ -33508,7 +32441,7 @@
                 <a:ea typeface="Courier New" pitchFamily="34" charset="-122"/>
                 <a:cs typeface="Courier New" pitchFamily="34" charset="-120"/>
               </a:rPr>
-              <a:t>Source · LSV Victorian Drowning Report 2024–25</a:t>
+              <a:t>Source · LSV Victorian Drowning Report 2023–24</a:t>
             </a:r>
             <a:endParaRPr lang="en-US" sz="1800" dirty="0"/>
           </a:p>
